--- a/global_economy_poster.pptx
+++ b/global_economy_poster.pptx
@@ -131,7 +131,7 @@
       </p:grpSpPr>
       <p:sp>
         <p:nvSpPr>
-          <p:cNvPr id="1474688814" name="Header Placeholder 1"/>
+          <p:cNvPr id="1425178290" name="Header Placeholder 1"/>
           <p:cNvSpPr>
             <a:spLocks noGrp="1"/>
           </p:cNvSpPr>
@@ -165,7 +165,7 @@
       </p:sp>
       <p:sp>
         <p:nvSpPr>
-          <p:cNvPr id="1327680500" name="Date Placeholder 2"/>
+          <p:cNvPr id="1955060723" name="Date Placeholder 2"/>
           <p:cNvSpPr>
             <a:spLocks noGrp="1"/>
           </p:cNvSpPr>
@@ -203,7 +203,7 @@
       </p:sp>
       <p:sp>
         <p:nvSpPr>
-          <p:cNvPr id="1112331374" name="Slide Image Placeholder 3"/>
+          <p:cNvPr id="899323672" name="Slide Image Placeholder 3"/>
           <p:cNvSpPr>
             <a:spLocks noChangeAspect="1" noGrp="1" noRot="1"/>
           </p:cNvSpPr>
@@ -239,7 +239,7 @@
       </p:sp>
       <p:sp>
         <p:nvSpPr>
-          <p:cNvPr id="1009585115" name="Notes Placeholder 4"/>
+          <p:cNvPr id="1536641649" name="Notes Placeholder 4"/>
           <p:cNvSpPr>
             <a:spLocks noGrp="1"/>
           </p:cNvSpPr>
@@ -313,7 +313,7 @@
       </p:sp>
       <p:sp>
         <p:nvSpPr>
-          <p:cNvPr id="47516316" name="Footer Placeholder 5"/>
+          <p:cNvPr id="562254242" name="Footer Placeholder 5"/>
           <p:cNvSpPr>
             <a:spLocks noGrp="1"/>
           </p:cNvSpPr>
@@ -347,7 +347,7 @@
       </p:sp>
       <p:sp>
         <p:nvSpPr>
-          <p:cNvPr id="1998077351" name="Slide Number Placeholder 6"/>
+          <p:cNvPr id="1243619258" name="Slide Number Placeholder 6"/>
           <p:cNvSpPr>
             <a:spLocks noGrp="1"/>
           </p:cNvSpPr>
@@ -500,7 +500,7 @@
       </p:grpSpPr>
       <p:sp>
         <p:nvSpPr>
-          <p:cNvPr id="1613674112" name="Slide Image Placeholder 1"/>
+          <p:cNvPr id="332076025" name="Slide Image Placeholder 1"/>
           <p:cNvSpPr>
             <a:spLocks noChangeAspect="1" noGrp="1" noRot="1"/>
           </p:cNvSpPr>
@@ -512,7 +512,7 @@
       </p:sp>
       <p:sp>
         <p:nvSpPr>
-          <p:cNvPr id="1463004405" name="Notes Placeholder 2"/>
+          <p:cNvPr id="133711018" name="Notes Placeholder 2"/>
           <p:cNvSpPr>
             <a:spLocks noGrp="1"/>
           </p:cNvSpPr>
@@ -534,7 +534,7 @@
       </p:sp>
       <p:sp>
         <p:nvSpPr>
-          <p:cNvPr id="640972464" name="Slide Number Placeholder 3"/>
+          <p:cNvPr id="2014135106" name="Slide Number Placeholder 3"/>
           <p:cNvSpPr>
             <a:spLocks noGrp="1"/>
           </p:cNvSpPr>
@@ -899,18 +899,712 @@
       </p:grpSpPr>
       <p:sp>
         <p:nvSpPr>
-          <p:cNvPr id="1244798988" name="Shape 0"/>
+          <p:cNvPr id="1991850379" name="Shape 4"/>
           <p:cNvSpPr/>
           <p:nvPr/>
         </p:nvSpPr>
         <p:spPr bwMode="auto">
-          <a:xfrm>
-            <a:off x="320040" y="144433"/>
-            <a:ext cx="11521440" cy="841248"/>
+          <a:xfrm flipH="0" flipV="0">
+            <a:off x="138431" y="112568"/>
+            <a:ext cx="3246120" cy="3443440"/>
           </a:xfrm>
           <a:prstGeom prst="roundRect">
             <a:avLst>
-              <a:gd name="adj" fmla="val 6522"/>
+              <a:gd name="adj" fmla="val 2182"/>
+            </a:avLst>
+          </a:prstGeom>
+          <a:solidFill>
+            <a:srgbClr val="FFFFFF"/>
+          </a:solidFill>
+          <a:ln/>
+          <a:effectLst>
+            <a:outerShdw blurRad="88900" dist="38100" dir="5400000" sx="100000" sy="100000" kx="0" ky="0" algn="bl" rotWithShape="0">
+              <a:srgbClr val="8AA0BE">
+                <a:alpha val="22000"/>
+              </a:srgbClr>
+            </a:outerShdw>
+          </a:effectLst>
+        </p:spPr>
+      </p:sp>
+      <p:sp>
+        <p:nvSpPr>
+          <p:cNvPr id="2120535712" name="Text 5"/>
+          <p:cNvSpPr/>
+          <p:nvPr/>
+        </p:nvSpPr>
+        <p:spPr bwMode="auto">
+          <a:xfrm>
+            <a:off x="293880" y="196732"/>
+            <a:ext cx="2916936" cy="274320"/>
+          </a:xfrm>
+          <a:prstGeom prst="rect">
+            <a:avLst/>
+          </a:prstGeom>
+          <a:noFill/>
+          <a:ln/>
+        </p:spPr>
+        <p:txBody>
+          <a:bodyPr wrap="square" lIns="0" tIns="0" rIns="0" bIns="0" rtlCol="0" anchor="ctr"/>
+          <a:lstStyle/>
+          <a:p>
+            <a:pPr marL="0" indent="0" algn="l">
+              <a:buNone/>
+              <a:defRPr/>
+            </a:pPr>
+            <a:r>
+              <a:rPr lang="en-US" sz="1250" b="1" spc="150">
+                <a:solidFill>
+                  <a:srgbClr val="734F96"/>
+                </a:solidFill>
+                <a:latin typeface="Cambria"/>
+                <a:ea typeface="Cambria"/>
+                <a:cs typeface="Cambria"/>
+              </a:rPr>
+              <a:t>THE ORIGINAL</a:t>
+            </a:r>
+            <a:endParaRPr sz="1250">
+              <a:solidFill>
+                <a:srgbClr val="734F96"/>
+              </a:solidFill>
+            </a:endParaRPr>
+          </a:p>
+        </p:txBody>
+      </p:sp>
+      <p:sp>
+        <p:nvSpPr>
+          <p:cNvPr id="1846421502" name="Text 6"/>
+          <p:cNvSpPr/>
+          <p:nvPr/>
+        </p:nvSpPr>
+        <p:spPr bwMode="auto">
+          <a:xfrm flipH="0" flipV="0">
+            <a:off x="293880" y="532635"/>
+            <a:ext cx="2980942" cy="566928"/>
+          </a:xfrm>
+          <a:prstGeom prst="rect">
+            <a:avLst/>
+          </a:prstGeom>
+          <a:noFill/>
+          <a:ln/>
+        </p:spPr>
+        <p:txBody>
+          <a:bodyPr wrap="square" lIns="0" tIns="0" rIns="0" bIns="0" rtlCol="0" anchor="t"/>
+          <a:lstStyle/>
+          <a:p>
+            <a:pPr marL="0" indent="0">
+              <a:buNone/>
+              <a:defRPr/>
+            </a:pPr>
+            <a:r>
+              <a:rPr lang="en-US" sz="1000">
+                <a:solidFill>
+                  <a:srgbClr val="1B2A4A"/>
+                </a:solidFill>
+                <a:latin typeface="Calibri"/>
+                <a:ea typeface="Calibri"/>
+                <a:cs typeface="Calibri"/>
+              </a:rPr>
+              <a:t>This visualization </a:t>
+            </a:r>
+            <a:r>
+              <a:rPr lang="en-US" sz="1000" b="0" i="0" u="none" strike="noStrike" cap="none" spc="0">
+                <a:solidFill>
+                  <a:srgbClr val="1B2A4A"/>
+                </a:solidFill>
+                <a:latin typeface="Calibri"/>
+                <a:ea typeface="Calibri"/>
+                <a:cs typeface="Calibri"/>
+              </a:rPr>
+              <a:t>displays the GDP for 195 countries and economies, as 2026 projections from the IMF’s April 2026 World Economic Outlook. It uses a voronoi treemap to display the country and its share of the $126T global total</a:t>
+            </a:r>
+            <a:endParaRPr lang="en-US" sz="1000"/>
+          </a:p>
+        </p:txBody>
+      </p:sp>
+      <p:sp>
+        <p:nvSpPr>
+          <p:cNvPr id="1689174956" name="Shape 10"/>
+          <p:cNvSpPr/>
+          <p:nvPr/>
+        </p:nvSpPr>
+        <p:spPr bwMode="auto">
+          <a:xfrm flipH="0" flipV="0">
+            <a:off x="129288" y="3212589"/>
+            <a:ext cx="3246120" cy="3532842"/>
+          </a:xfrm>
+          <a:prstGeom prst="roundRect">
+            <a:avLst>
+              <a:gd name="adj" fmla="val 2048"/>
+            </a:avLst>
+          </a:prstGeom>
+          <a:solidFill>
+            <a:srgbClr val="FFFFFF"/>
+          </a:solidFill>
+          <a:ln/>
+          <a:effectLst>
+            <a:outerShdw blurRad="88900" dist="38100" dir="5400000" sx="100000" sy="100000" kx="0" ky="0" algn="bl" rotWithShape="0">
+              <a:srgbClr val="8AA0BE">
+                <a:alpha val="22000"/>
+              </a:srgbClr>
+            </a:outerShdw>
+          </a:effectLst>
+        </p:spPr>
+      </p:sp>
+      <p:sp>
+        <p:nvSpPr>
+          <p:cNvPr id="987123457" name="Text 12"/>
+          <p:cNvSpPr/>
+          <p:nvPr/>
+        </p:nvSpPr>
+        <p:spPr bwMode="auto">
+          <a:xfrm>
+            <a:off x="293880" y="4808909"/>
+            <a:ext cx="2916936" cy="219456"/>
+          </a:xfrm>
+          <a:prstGeom prst="rect">
+            <a:avLst/>
+          </a:prstGeom>
+          <a:noFill/>
+          <a:ln/>
+        </p:spPr>
+        <p:txBody>
+          <a:bodyPr wrap="square" lIns="0" tIns="0" rIns="0" bIns="0" rtlCol="0" anchor="ctr"/>
+          <a:lstStyle/>
+          <a:p>
+            <a:pPr marL="0" indent="0">
+              <a:buNone/>
+              <a:defRPr/>
+            </a:pPr>
+            <a:r>
+              <a:rPr lang="en-US" sz="1000" b="1">
+                <a:solidFill>
+                  <a:srgbClr val="0E7C86"/>
+                </a:solidFill>
+                <a:latin typeface="Calibri"/>
+                <a:ea typeface="Calibri"/>
+                <a:cs typeface="Calibri"/>
+              </a:rPr>
+              <a:t>Strengths</a:t>
+            </a:r>
+            <a:endParaRPr lang="en-US" sz="1000"/>
+          </a:p>
+        </p:txBody>
+      </p:sp>
+      <p:sp>
+        <p:nvSpPr>
+          <p:cNvPr id="1038449395" name="Text 13"/>
+          <p:cNvSpPr/>
+          <p:nvPr/>
+        </p:nvSpPr>
+        <p:spPr bwMode="auto">
+          <a:xfrm>
+            <a:off x="312168" y="4846039"/>
+            <a:ext cx="2898648" cy="713232"/>
+          </a:xfrm>
+          <a:prstGeom prst="rect">
+            <a:avLst/>
+          </a:prstGeom>
+          <a:noFill/>
+          <a:ln/>
+        </p:spPr>
+        <p:txBody>
+          <a:bodyPr wrap="square" lIns="0" tIns="0" rIns="0" bIns="0" rtlCol="0" anchor="ctr"/>
+          <a:lstStyle/>
+          <a:p>
+            <a:pPr marL="342900" indent="-342900">
+              <a:spcAft>
+                <a:spcPts val="200"/>
+              </a:spcAft>
+              <a:buSzPct val="100000"/>
+              <a:buChar char="•"/>
+              <a:defRPr/>
+            </a:pPr>
+            <a:r>
+              <a:rPr lang="en-US" sz="950">
+                <a:solidFill>
+                  <a:srgbClr val="1B2A4A"/>
+                </a:solidFill>
+                <a:latin typeface="Calibri"/>
+                <a:ea typeface="Calibri"/>
+                <a:cs typeface="Calibri"/>
+              </a:rPr>
+              <a:t>High visual salience, draws readers in</a:t>
+            </a:r>
+            <a:endParaRPr lang="en-US" sz="950"/>
+          </a:p>
+          <a:p>
+            <a:pPr marL="342900" indent="-342900">
+              <a:spcAft>
+                <a:spcPts val="200"/>
+              </a:spcAft>
+              <a:buSzPct val="100000"/>
+              <a:buChar char="•"/>
+              <a:defRPr/>
+            </a:pPr>
+            <a:r>
+              <a:rPr lang="en-US" sz="950">
+                <a:solidFill>
+                  <a:srgbClr val="1B2A4A"/>
+                </a:solidFill>
+                <a:latin typeface="Calibri"/>
+                <a:ea typeface="Calibri"/>
+                <a:cs typeface="Calibri"/>
+              </a:rPr>
+              <a:t>Region colour shows macro clusters</a:t>
+            </a:r>
+            <a:endParaRPr lang="en-US" sz="950"/>
+          </a:p>
+        </p:txBody>
+      </p:sp>
+      <p:sp>
+        <p:nvSpPr>
+          <p:cNvPr id="1795674002" name="Text 14"/>
+          <p:cNvSpPr/>
+          <p:nvPr/>
+        </p:nvSpPr>
+        <p:spPr bwMode="auto">
+          <a:xfrm>
+            <a:off x="293880" y="5447673"/>
+            <a:ext cx="2916936" cy="219456"/>
+          </a:xfrm>
+          <a:prstGeom prst="rect">
+            <a:avLst/>
+          </a:prstGeom>
+          <a:noFill/>
+          <a:ln/>
+        </p:spPr>
+        <p:txBody>
+          <a:bodyPr wrap="square" lIns="0" tIns="0" rIns="0" bIns="0" rtlCol="0" anchor="ctr"/>
+          <a:lstStyle/>
+          <a:p>
+            <a:pPr marL="0" indent="0">
+              <a:buNone/>
+              <a:defRPr/>
+            </a:pPr>
+            <a:r>
+              <a:rPr lang="en-US" sz="1000" b="1">
+                <a:solidFill>
+                  <a:srgbClr val="C0392B"/>
+                </a:solidFill>
+                <a:latin typeface="Calibri"/>
+                <a:ea typeface="Calibri"/>
+                <a:cs typeface="Calibri"/>
+              </a:rPr>
+              <a:t>Weakness</a:t>
+            </a:r>
+            <a:endParaRPr lang="en-US" sz="1000"/>
+          </a:p>
+        </p:txBody>
+      </p:sp>
+      <p:sp>
+        <p:nvSpPr>
+          <p:cNvPr id="952758840" name="Text 15"/>
+          <p:cNvSpPr/>
+          <p:nvPr/>
+        </p:nvSpPr>
+        <p:spPr bwMode="auto">
+          <a:xfrm>
+            <a:off x="312168" y="5614689"/>
+            <a:ext cx="2898648" cy="1097280"/>
+          </a:xfrm>
+          <a:prstGeom prst="rect">
+            <a:avLst/>
+          </a:prstGeom>
+          <a:noFill/>
+          <a:ln/>
+        </p:spPr>
+        <p:txBody>
+          <a:bodyPr wrap="square" lIns="0" tIns="0" rIns="0" bIns="0" rtlCol="0" anchor="ctr"/>
+          <a:lstStyle/>
+          <a:p>
+            <a:pPr marL="342900" indent="-342900">
+              <a:spcAft>
+                <a:spcPts val="200"/>
+              </a:spcAft>
+              <a:buSzPct val="100000"/>
+              <a:buChar char="•"/>
+              <a:defRPr/>
+            </a:pPr>
+            <a:r>
+              <a:rPr lang="en-US" sz="950">
+                <a:solidFill>
+                  <a:srgbClr val="1B2A4A"/>
+                </a:solidFill>
+                <a:latin typeface="Calibri"/>
+                <a:ea typeface="Calibri"/>
+                <a:cs typeface="Calibri"/>
+              </a:rPr>
+              <a:t>Area is hard to compare precisely</a:t>
+            </a:r>
+            <a:endParaRPr lang="en-US" sz="950">
+              <a:solidFill>
+                <a:srgbClr val="1B2A4A"/>
+              </a:solidFill>
+              <a:latin typeface="Calibri"/>
+              <a:ea typeface="Calibri"/>
+              <a:cs typeface="Calibri"/>
+            </a:endParaRPr>
+          </a:p>
+          <a:p>
+            <a:pPr marL="342900" indent="-342900">
+              <a:spcAft>
+                <a:spcPts val="199"/>
+              </a:spcAft>
+              <a:buSzPct val="100000"/>
+              <a:buChar char="•"/>
+              <a:defRPr/>
+            </a:pPr>
+            <a:r>
+              <a:rPr lang="en-US" sz="950" b="0" i="0" u="none" strike="noStrike" cap="none" spc="0">
+                <a:solidFill>
+                  <a:srgbClr val="1B2A4A"/>
+                </a:solidFill>
+                <a:latin typeface="Calibri"/>
+                <a:ea typeface="Calibri"/>
+                <a:cs typeface="Calibri"/>
+              </a:rPr>
+              <a:t>Units mix billions and trillions</a:t>
+            </a:r>
+            <a:endParaRPr sz="950"/>
+          </a:p>
+          <a:p>
+            <a:pPr marL="342900" indent="-342900">
+              <a:spcAft>
+                <a:spcPts val="200"/>
+              </a:spcAft>
+              <a:buSzPct val="100000"/>
+              <a:buChar char="•"/>
+              <a:defRPr/>
+            </a:pPr>
+            <a:r>
+              <a:rPr lang="en-US" sz="950">
+                <a:solidFill>
+                  <a:srgbClr val="1B2A4A"/>
+                </a:solidFill>
+                <a:latin typeface="Calibri"/>
+                <a:ea typeface="Calibri"/>
+                <a:cs typeface="Calibri"/>
+              </a:rPr>
+              <a:t>Region colours repeat / look alike</a:t>
+            </a:r>
+            <a:endParaRPr lang="en-US" sz="950"/>
+          </a:p>
+          <a:p>
+            <a:pPr marL="342900" indent="-342900">
+              <a:spcAft>
+                <a:spcPts val="200"/>
+              </a:spcAft>
+              <a:buSzPct val="100000"/>
+              <a:buChar char="•"/>
+              <a:defRPr/>
+            </a:pPr>
+            <a:r>
+              <a:rPr lang="en-US" sz="950">
+                <a:solidFill>
+                  <a:srgbClr val="1B2A4A"/>
+                </a:solidFill>
+                <a:latin typeface="Calibri"/>
+                <a:ea typeface="Calibri"/>
+                <a:cs typeface="Calibri"/>
+              </a:rPr>
+              <a:t>No ranking, per-capita, or trend</a:t>
+            </a:r>
+            <a:endParaRPr lang="en-US" sz="950">
+              <a:solidFill>
+                <a:srgbClr val="1B2A4A"/>
+              </a:solidFill>
+              <a:latin typeface="Calibri"/>
+              <a:ea typeface="Calibri"/>
+              <a:cs typeface="Calibri"/>
+            </a:endParaRPr>
+          </a:p>
+          <a:p>
+            <a:pPr marL="342900" indent="-342900">
+              <a:spcAft>
+                <a:spcPts val="199"/>
+              </a:spcAft>
+              <a:buSzPct val="100000"/>
+              <a:buChar char="•"/>
+              <a:defRPr/>
+            </a:pPr>
+            <a:r>
+              <a:rPr lang="en-US" sz="950" b="0" i="0" u="none" strike="noStrike" cap="none" spc="0">
+                <a:solidFill>
+                  <a:srgbClr val="1B2A4A"/>
+                </a:solidFill>
+                <a:latin typeface="Calibri"/>
+                <a:ea typeface="Calibri"/>
+                <a:cs typeface="Calibri"/>
+              </a:rPr>
+              <a:t>One year's data cannot prove Asia's shifting economic weight</a:t>
+            </a:r>
+            <a:endParaRPr lang="en-US" sz="950"/>
+          </a:p>
+        </p:txBody>
+      </p:sp>
+      <p:sp>
+        <p:nvSpPr>
+          <p:cNvPr id="1413460880" name="Shape 16"/>
+          <p:cNvSpPr/>
+          <p:nvPr/>
+        </p:nvSpPr>
+        <p:spPr bwMode="auto">
+          <a:xfrm flipH="0" flipV="0">
+            <a:off x="3466897" y="119394"/>
+            <a:ext cx="5585113" cy="6626036"/>
+          </a:xfrm>
+          <a:prstGeom prst="roundRect">
+            <a:avLst>
+              <a:gd name="adj" fmla="val 1081"/>
+            </a:avLst>
+          </a:prstGeom>
+          <a:solidFill>
+            <a:srgbClr val="FFFFFF"/>
+          </a:solidFill>
+          <a:ln/>
+          <a:effectLst>
+            <a:outerShdw blurRad="88900" dist="38100" dir="5400000" sx="100000" sy="100000" kx="0" ky="0" algn="bl" rotWithShape="0">
+              <a:srgbClr val="8AA0BE">
+                <a:alpha val="22000"/>
+              </a:srgbClr>
+            </a:outerShdw>
+          </a:effectLst>
+        </p:spPr>
+      </p:sp>
+      <p:sp>
+        <p:nvSpPr>
+          <p:cNvPr id="60995559" name="Text 17"/>
+          <p:cNvSpPr/>
+          <p:nvPr/>
+        </p:nvSpPr>
+        <p:spPr bwMode="auto">
+          <a:xfrm>
+            <a:off x="3608858" y="196732"/>
+            <a:ext cx="4709160" cy="274320"/>
+          </a:xfrm>
+          <a:prstGeom prst="rect">
+            <a:avLst/>
+          </a:prstGeom>
+          <a:noFill/>
+          <a:ln/>
+        </p:spPr>
+        <p:txBody>
+          <a:bodyPr wrap="square" lIns="0" tIns="0" rIns="0" bIns="0" rtlCol="0" anchor="ctr"/>
+          <a:lstStyle/>
+          <a:p>
+            <a:pPr marL="0" indent="0" algn="l">
+              <a:buNone/>
+              <a:defRPr/>
+            </a:pPr>
+            <a:r>
+              <a:rPr lang="en-US" sz="1250" b="1" spc="150">
+                <a:solidFill>
+                  <a:srgbClr val="734F96"/>
+                </a:solidFill>
+                <a:latin typeface="Cambria"/>
+                <a:ea typeface="Cambria"/>
+                <a:cs typeface="Cambria"/>
+              </a:rPr>
+              <a:t>OUR REDESIGN</a:t>
+            </a:r>
+            <a:endParaRPr sz="1250">
+              <a:solidFill>
+                <a:srgbClr val="734F96"/>
+              </a:solidFill>
+            </a:endParaRPr>
+          </a:p>
+        </p:txBody>
+      </p:sp>
+      <p:sp>
+        <p:nvSpPr>
+          <p:cNvPr id="538342682" name="Text 20"/>
+          <p:cNvSpPr/>
+          <p:nvPr/>
+        </p:nvSpPr>
+        <p:spPr bwMode="auto">
+          <a:xfrm flipH="0" flipV="0">
+            <a:off x="3695447" y="3990524"/>
+            <a:ext cx="1535277" cy="274320"/>
+          </a:xfrm>
+          <a:prstGeom prst="rect">
+            <a:avLst/>
+          </a:prstGeom>
+          <a:noFill/>
+          <a:ln/>
+        </p:spPr>
+        <p:txBody>
+          <a:bodyPr wrap="square" lIns="0" tIns="0" rIns="0" bIns="0" rtlCol="0" anchor="ctr"/>
+          <a:lstStyle/>
+          <a:p>
+            <a:pPr marL="0" indent="0" algn="l">
+              <a:buNone/>
+              <a:defRPr/>
+            </a:pPr>
+            <a:r>
+              <a:rPr lang="en-US" sz="1250" b="1" spc="150">
+                <a:solidFill>
+                  <a:srgbClr val="734F96"/>
+                </a:solidFill>
+                <a:latin typeface="Cambria"/>
+                <a:ea typeface="Cambria"/>
+                <a:cs typeface="Cambria"/>
+              </a:rPr>
+              <a:t>WHAT CHANGED</a:t>
+            </a:r>
+            <a:endParaRPr sz="1250">
+              <a:solidFill>
+                <a:srgbClr val="734F96"/>
+              </a:solidFill>
+            </a:endParaRPr>
+          </a:p>
+        </p:txBody>
+      </p:sp>
+      <p:sp>
+        <p:nvSpPr>
+          <p:cNvPr id="656503291" name="Text 21"/>
+          <p:cNvSpPr/>
+          <p:nvPr/>
+        </p:nvSpPr>
+        <p:spPr bwMode="auto">
+          <a:xfrm flipH="0" flipV="0">
+            <a:off x="3713735" y="4481321"/>
+            <a:ext cx="2354579" cy="1097280"/>
+          </a:xfrm>
+          <a:prstGeom prst="rect">
+            <a:avLst/>
+          </a:prstGeom>
+          <a:noFill/>
+          <a:ln/>
+        </p:spPr>
+        <p:txBody>
+          <a:bodyPr wrap="square" lIns="0" tIns="0" rIns="0" bIns="0" rtlCol="0" anchor="ctr"/>
+          <a:lstStyle/>
+          <a:p>
+            <a:pPr marL="342900" indent="-342900">
+              <a:spcAft>
+                <a:spcPts val="250"/>
+              </a:spcAft>
+              <a:buSzPct val="100000"/>
+              <a:buChar char="•"/>
+              <a:defRPr/>
+            </a:pPr>
+            <a:r>
+              <a:rPr lang="en-US" sz="950">
+                <a:solidFill>
+                  <a:srgbClr val="1B2A4A"/>
+                </a:solidFill>
+                <a:latin typeface="Calibri"/>
+                <a:ea typeface="Calibri"/>
+                <a:cs typeface="Calibri"/>
+              </a:rPr>
+              <a:t>Ranked bars replace areas</a:t>
+            </a:r>
+            <a:endParaRPr sz="950"/>
+          </a:p>
+          <a:p>
+            <a:pPr marL="342900" indent="-342900">
+              <a:spcAft>
+                <a:spcPts val="250"/>
+              </a:spcAft>
+              <a:buSzPct val="100000"/>
+              <a:buChar char="•"/>
+              <a:defRPr/>
+            </a:pPr>
+            <a:r>
+              <a:rPr lang="en-US" sz="950">
+                <a:solidFill>
+                  <a:srgbClr val="1B2A4A"/>
+                </a:solidFill>
+                <a:latin typeface="Calibri"/>
+                <a:ea typeface="Calibri"/>
+                <a:cs typeface="Calibri"/>
+              </a:rPr>
+              <a:t>One consistent unit (USD trillions) across the whole chart</a:t>
+            </a:r>
+            <a:endParaRPr sz="950"/>
+          </a:p>
+          <a:p>
+            <a:pPr marL="342900" indent="-342900">
+              <a:spcAft>
+                <a:spcPts val="250"/>
+              </a:spcAft>
+              <a:buSzPct val="100000"/>
+              <a:buChar char="•"/>
+              <a:defRPr/>
+            </a:pPr>
+            <a:r>
+              <a:rPr lang="en-US" sz="950">
+                <a:solidFill>
+                  <a:srgbClr val="1B2A4A"/>
+                </a:solidFill>
+                <a:latin typeface="Calibri"/>
+                <a:ea typeface="Calibri"/>
+                <a:cs typeface="Calibri"/>
+              </a:rPr>
+              <a:t>Colour-blind-safe palette: one distinct hue per region</a:t>
+            </a:r>
+            <a:endParaRPr sz="950"/>
+          </a:p>
+          <a:p>
+            <a:pPr marL="342900" indent="-342900">
+              <a:spcAft>
+                <a:spcPts val="250"/>
+              </a:spcAft>
+              <a:buSzPct val="100000"/>
+              <a:buChar char="•"/>
+              <a:defRPr/>
+            </a:pPr>
+            <a:r>
+              <a:rPr lang="en-US" sz="950">
+                <a:solidFill>
+                  <a:srgbClr val="1B2A4A"/>
+                </a:solidFill>
+                <a:latin typeface="Calibri"/>
+                <a:ea typeface="Calibri"/>
+                <a:cs typeface="Calibri"/>
+              </a:rPr>
+              <a:t>GDP per capita separates market size from prosperity</a:t>
+            </a:r>
+            <a:endParaRPr sz="950"/>
+          </a:p>
+          <a:p>
+            <a:pPr marL="342900" indent="-342900">
+              <a:spcAft>
+                <a:spcPts val="250"/>
+              </a:spcAft>
+              <a:buSzPct val="100000"/>
+              <a:buChar char="•"/>
+              <a:defRPr/>
+            </a:pPr>
+            <a:r>
+              <a:rPr lang="en-US" sz="950">
+                <a:solidFill>
+                  <a:srgbClr val="1B2A4A"/>
+                </a:solidFill>
+                <a:latin typeface="Calibri"/>
+                <a:ea typeface="Calibri"/>
+                <a:cs typeface="Calibri"/>
+              </a:rPr>
+              <a:t>Showing of “Asia shift”story by adding GDP Share by Region panel</a:t>
+            </a:r>
+            <a:endParaRPr lang="en-US" sz="1000"/>
+          </a:p>
+        </p:txBody>
+      </p:sp>
+      <p:sp>
+        <p:nvSpPr>
+          <p:cNvPr id="249947183" name="Shape 22"/>
+          <p:cNvSpPr/>
+          <p:nvPr/>
+        </p:nvSpPr>
+        <p:spPr bwMode="auto">
+          <a:xfrm flipH="0" flipV="0">
+            <a:off x="9185034" y="112568"/>
+            <a:ext cx="2898648" cy="3617075"/>
+          </a:xfrm>
+          <a:prstGeom prst="roundRect">
+            <a:avLst>
+              <a:gd name="adj" fmla="val 2034"/>
             </a:avLst>
           </a:prstGeom>
           <a:solidFill>
@@ -928,14 +1622,14 @@
       </p:sp>
       <p:sp>
         <p:nvSpPr>
-          <p:cNvPr id="652645267" name="Text 1"/>
+          <p:cNvPr id="2092400368" name="Text 23"/>
           <p:cNvSpPr/>
           <p:nvPr/>
         </p:nvSpPr>
         <p:spPr bwMode="auto">
           <a:xfrm>
-            <a:off x="548640" y="199297"/>
-            <a:ext cx="7955280" cy="457200"/>
+            <a:off x="9349627" y="196732"/>
+            <a:ext cx="2569464" cy="274320"/>
           </a:xfrm>
           <a:prstGeom prst="rect">
             <a:avLst/>
@@ -952,7 +1646,7 @@
               <a:defRPr/>
             </a:pPr>
             <a:r>
-              <a:rPr lang="en-US" sz="2500" b="1">
+              <a:rPr lang="en-US" sz="1250" b="1" spc="150">
                 <a:solidFill>
                   <a:srgbClr val="FFFFFF"/>
                 </a:solidFill>
@@ -960,22 +1654,22 @@
                 <a:ea typeface="Cambria"/>
                 <a:cs typeface="Cambria"/>
               </a:rPr>
-              <a:t>The $126T Global Economy — Redesigned</a:t>
-            </a:r>
-            <a:endParaRPr lang="en-US" sz="2500"/>
+              <a:t>DESIGN BRIEF</a:t>
+            </a:r>
+            <a:endParaRPr lang="en-US" sz="1250"/>
           </a:p>
         </p:txBody>
       </p:sp>
       <p:sp>
         <p:nvSpPr>
-          <p:cNvPr id="1014241973" name="Text 2"/>
+          <p:cNvPr id="1898135445" name="Text 24"/>
           <p:cNvSpPr/>
           <p:nvPr/>
         </p:nvSpPr>
         <p:spPr bwMode="auto">
           <a:xfrm>
-            <a:off x="566928" y="629065"/>
-            <a:ext cx="7863840" cy="292608"/>
+            <a:off x="9349627" y="575930"/>
+            <a:ext cx="2569464" cy="2212848"/>
           </a:xfrm>
           <a:prstGeom prst="rect">
             <a:avLst/>
@@ -984,122 +1678,327 @@
           <a:ln/>
         </p:spPr>
         <p:txBody>
-          <a:bodyPr wrap="square" lIns="0" tIns="0" rIns="0" bIns="0" rtlCol="0" anchor="ctr"/>
+          <a:bodyPr wrap="square" lIns="0" tIns="0" rIns="0" bIns="0" rtlCol="0" anchor="t"/>
           <a:lstStyle/>
           <a:p>
+            <a:pPr>
+              <a:defRPr/>
+            </a:pPr>
+            <a:r>
+              <a:rPr lang="en-US" sz="950" b="0" i="0" u="none" strike="noStrike" cap="none" spc="0">
+                <a:solidFill>
+                  <a:srgbClr val="EAF1FB"/>
+                </a:solidFill>
+                <a:latin typeface="Calibri"/>
+                <a:ea typeface="Calibri"/>
+                <a:cs typeface="Calibri"/>
+              </a:rPr>
+              <a:t>This redesign is intended for economic and trade-policy analysts prioritizing global markets</a:t>
+            </a:r>
+            <a:endParaRPr lang="en-US" sz="950" b="0" i="0" u="none" strike="noStrike" cap="none" spc="0">
+              <a:solidFill>
+                <a:srgbClr val="EAF1FB"/>
+              </a:solidFill>
+              <a:latin typeface="Calibri"/>
+              <a:cs typeface="Calibri"/>
+            </a:endParaRPr>
+          </a:p>
+          <a:p>
+            <a:pPr>
+              <a:defRPr/>
+            </a:pPr>
+            <a:r>
+              <a:rPr lang="en-US" sz="950" b="0" i="0" u="none" strike="noStrike" cap="none" spc="0">
+                <a:solidFill>
+                  <a:srgbClr val="EAF1FB"/>
+                </a:solidFill>
+                <a:latin typeface="Calibri"/>
+                <a:ea typeface="Calibri"/>
+                <a:cs typeface="Calibri"/>
+              </a:rPr>
+              <a:t>and trade partnerships.</a:t>
+            </a:r>
+            <a:endParaRPr lang="en-US" sz="950" b="0" i="0" u="none" strike="noStrike" cap="none" spc="0">
+              <a:solidFill>
+                <a:srgbClr val="EAF1FB"/>
+              </a:solidFill>
+              <a:latin typeface="Calibri"/>
+              <a:ea typeface="Calibri"/>
+              <a:cs typeface="Calibri"/>
+            </a:endParaRPr>
+          </a:p>
+          <a:p>
+            <a:pPr>
+              <a:defRPr/>
+            </a:pPr>
+            <a:endParaRPr lang="en-US" sz="950" b="0" i="0" u="none" strike="noStrike" cap="none" spc="0">
+              <a:solidFill>
+                <a:srgbClr val="EAF1FB"/>
+              </a:solidFill>
+              <a:latin typeface="Calibri"/>
+              <a:ea typeface="Calibri"/>
+              <a:cs typeface="Calibri"/>
+            </a:endParaRPr>
+          </a:p>
+          <a:p>
+            <a:pPr>
+              <a:defRPr/>
+            </a:pPr>
+            <a:r>
+              <a:rPr lang="en-US" sz="950" b="0" i="0" u="none" strike="noStrike" cap="none" spc="0">
+                <a:solidFill>
+                  <a:srgbClr val="EAF1FB"/>
+                </a:solidFill>
+                <a:latin typeface="Calibri"/>
+                <a:ea typeface="Calibri"/>
+                <a:cs typeface="Calibri"/>
+              </a:rPr>
+              <a:t>The goal is to clearly rank and compare the total absolute market </a:t>
+            </a:r>
+            <a:r>
+              <a:rPr lang="en-US" sz="950" b="0" i="0" u="none" strike="noStrike" cap="none" spc="0">
+                <a:solidFill>
+                  <a:srgbClr val="EAF1FB"/>
+                </a:solidFill>
+                <a:latin typeface="Calibri"/>
+                <a:ea typeface="Calibri"/>
+                <a:cs typeface="Calibri"/>
+              </a:rPr>
+              <a:t>size of individual economies for the year 2026.</a:t>
+            </a:r>
+            <a:r>
+              <a:rPr lang="en-US" sz="950">
+                <a:solidFill>
+                  <a:srgbClr val="EAF1FB"/>
+                </a:solidFill>
+                <a:latin typeface="Calibri"/>
+                <a:ea typeface="Calibri"/>
+                <a:cs typeface="Calibri"/>
+              </a:rPr>
+              <a:t> </a:t>
+            </a:r>
+            <a:endParaRPr lang="en-US" sz="950">
+              <a:solidFill>
+                <a:srgbClr val="EAF1FB"/>
+              </a:solidFill>
+              <a:latin typeface="Calibri"/>
+              <a:ea typeface="Calibri"/>
+              <a:cs typeface="Calibri"/>
+            </a:endParaRPr>
+          </a:p>
+          <a:p>
+            <a:pPr>
+              <a:defRPr/>
+            </a:pPr>
+            <a:endParaRPr lang="en-US" sz="950">
+              <a:solidFill>
+                <a:srgbClr val="EAF1FB"/>
+              </a:solidFill>
+              <a:latin typeface="Calibri"/>
+              <a:ea typeface="Calibri"/>
+              <a:cs typeface="Calibri"/>
+            </a:endParaRPr>
+          </a:p>
+          <a:p>
+            <a:pPr>
+              <a:defRPr/>
+            </a:pPr>
+            <a:r>
+              <a:rPr lang="en-US" sz="950">
+                <a:solidFill>
+                  <a:srgbClr val="EAF1FB"/>
+                </a:solidFill>
+                <a:latin typeface="Calibri"/>
+                <a:ea typeface="Calibri"/>
+                <a:cs typeface="Calibri"/>
+              </a:rPr>
+              <a:t>In addition, it also aims to show that the economic weight is shifting towards Asia since 2000.</a:t>
+            </a:r>
+            <a:endParaRPr lang="en-US" sz="950" b="0" i="0" u="none" strike="noStrike" cap="none" spc="0">
+              <a:solidFill>
+                <a:srgbClr val="EAF1FB"/>
+              </a:solidFill>
+              <a:latin typeface="Calibri"/>
+              <a:cs typeface="Calibri"/>
+            </a:endParaRPr>
+          </a:p>
+          <a:p>
             <a:pPr marL="0" indent="0">
+              <a:lnSpc>
+                <a:spcPct val="102000"/>
+              </a:lnSpc>
               <a:buNone/>
               <a:defRPr/>
             </a:pPr>
-            <a:r>
-              <a:rPr lang="en-US" sz="1250" i="1">
-                <a:solidFill>
-                  <a:srgbClr val="C7D6EC"/>
-                </a:solidFill>
-                <a:latin typeface="Calibri"/>
-                <a:ea typeface="Calibri"/>
-                <a:cs typeface="Calibri"/>
-              </a:rPr>
-              <a:t>From a Voronoi treemap to a task-driven, comparison-first redesign</a:t>
-            </a:r>
-            <a:endParaRPr lang="en-US" sz="1250"/>
+            <a:endParaRPr lang="en-US" sz="950">
+              <a:solidFill>
+                <a:srgbClr val="EAF1FB"/>
+              </a:solidFill>
+              <a:latin typeface="Calibri"/>
+              <a:ea typeface="Calibri"/>
+              <a:cs typeface="Calibri"/>
+            </a:endParaRPr>
+          </a:p>
+          <a:p>
+            <a:pPr marL="0" indent="0">
+              <a:lnSpc>
+                <a:spcPct val="102000"/>
+              </a:lnSpc>
+              <a:buNone/>
+              <a:defRPr/>
+            </a:pPr>
+            <a:r>
+              <a:rPr lang="en-US" sz="950" b="1">
+                <a:solidFill>
+                  <a:srgbClr val="8FD4DC"/>
+                </a:solidFill>
+                <a:latin typeface="Calibri"/>
+                <a:ea typeface="Calibri"/>
+                <a:cs typeface="Calibri"/>
+              </a:rPr>
+              <a:t>Revisions: </a:t>
+            </a:r>
+            <a:endParaRPr lang="en-US" sz="950">
+              <a:solidFill>
+                <a:srgbClr val="EAF1FB"/>
+              </a:solidFill>
+              <a:latin typeface="Calibri"/>
+              <a:ea typeface="Calibri"/>
+              <a:cs typeface="Calibri"/>
+            </a:endParaRPr>
+          </a:p>
+          <a:p>
+            <a:pPr marL="190257" indent="-190257">
+              <a:lnSpc>
+                <a:spcPct val="102000"/>
+              </a:lnSpc>
+              <a:buFont typeface="Arial"/>
+              <a:buChar char="•"/>
+              <a:defRPr/>
+            </a:pPr>
+            <a:r>
+              <a:rPr lang="en-US" sz="950">
+                <a:solidFill>
+                  <a:srgbClr val="EAF1FB"/>
+                </a:solidFill>
+                <a:latin typeface="Calibri"/>
+                <a:ea typeface="Calibri"/>
+                <a:cs typeface="Calibri"/>
+              </a:rPr>
+              <a:t>Side by side horizontal bar chart comparison for nominal GDP and individual affluence</a:t>
+            </a:r>
+            <a:endParaRPr lang="en-US" sz="950">
+              <a:solidFill>
+                <a:srgbClr val="EAF1FB"/>
+              </a:solidFill>
+              <a:latin typeface="Calibri"/>
+              <a:ea typeface="Calibri"/>
+              <a:cs typeface="Calibri"/>
+            </a:endParaRPr>
+          </a:p>
+          <a:p>
+            <a:pPr marL="190257" indent="-190257">
+              <a:lnSpc>
+                <a:spcPct val="102000"/>
+              </a:lnSpc>
+              <a:buFont typeface="Arial"/>
+              <a:buChar char="•"/>
+              <a:defRPr/>
+            </a:pPr>
+            <a:r>
+              <a:rPr lang="en-US" sz="950">
+                <a:solidFill>
+                  <a:srgbClr val="EAF1FB"/>
+                </a:solidFill>
+                <a:latin typeface="Calibri"/>
+                <a:ea typeface="Calibri"/>
+                <a:cs typeface="Calibri"/>
+              </a:rPr>
+              <a:t>Line chart to show the GDP share by region trend</a:t>
+            </a:r>
+            <a:endParaRPr lang="en-US" sz="950">
+              <a:solidFill>
+                <a:srgbClr val="EAF1FB"/>
+              </a:solidFill>
+              <a:latin typeface="Calibri"/>
+              <a:ea typeface="Calibri"/>
+              <a:cs typeface="Calibri"/>
+            </a:endParaRPr>
+          </a:p>
+          <a:p>
+            <a:pPr marL="190257" indent="-190257">
+              <a:lnSpc>
+                <a:spcPct val="102000"/>
+              </a:lnSpc>
+              <a:buFont typeface="Arial"/>
+              <a:buChar char="•"/>
+              <a:defRPr/>
+            </a:pPr>
+            <a:r>
+              <a:rPr lang="en-US" sz="950">
+                <a:solidFill>
+                  <a:srgbClr val="EAF1FB"/>
+                </a:solidFill>
+                <a:latin typeface="Calibri"/>
+                <a:ea typeface="Calibri"/>
+                <a:cs typeface="Calibri"/>
+              </a:rPr>
+              <a:t>Distinct colour palette for each region</a:t>
+            </a:r>
+            <a:endParaRPr lang="en-US" sz="950">
+              <a:solidFill>
+                <a:srgbClr val="EAF1FB"/>
+              </a:solidFill>
+              <a:latin typeface="Calibri"/>
+              <a:ea typeface="Calibri"/>
+              <a:cs typeface="Calibri"/>
+            </a:endParaRPr>
+          </a:p>
+          <a:p>
+            <a:pPr marL="190257" indent="-190257">
+              <a:lnSpc>
+                <a:spcPct val="102000"/>
+              </a:lnSpc>
+              <a:buFont typeface="Arial"/>
+              <a:buChar char="•"/>
+              <a:defRPr/>
+            </a:pPr>
+            <a:r>
+              <a:rPr lang="en-US" sz="950">
+                <a:solidFill>
+                  <a:srgbClr val="EAF1FB"/>
+                </a:solidFill>
+                <a:latin typeface="Calibri"/>
+                <a:ea typeface="Calibri"/>
+                <a:cs typeface="Calibri"/>
+              </a:rPr>
+              <a:t>Standardized units in USD trillions</a:t>
+            </a:r>
+            <a:endParaRPr lang="en-US" sz="950">
+              <a:solidFill>
+                <a:srgbClr val="EAF1FB"/>
+              </a:solidFill>
+              <a:latin typeface="Calibri"/>
+              <a:ea typeface="Calibri"/>
+              <a:cs typeface="Calibri"/>
+            </a:endParaRPr>
           </a:p>
         </p:txBody>
       </p:sp>
       <p:sp>
         <p:nvSpPr>
-          <p:cNvPr id="2109844008" name="Text 3"/>
+          <p:cNvPr id="37315900" name="Shape 25"/>
           <p:cNvSpPr/>
           <p:nvPr/>
         </p:nvSpPr>
         <p:spPr bwMode="auto">
-          <a:xfrm>
-            <a:off x="8503920" y="199297"/>
-            <a:ext cx="3200400" cy="713232"/>
-          </a:xfrm>
-          <a:prstGeom prst="rect">
-            <a:avLst/>
-          </a:prstGeom>
-          <a:noFill/>
-          <a:ln/>
-        </p:spPr>
-        <p:txBody>
-          <a:bodyPr wrap="square" lIns="0" tIns="0" rIns="0" bIns="0" rtlCol="0" anchor="ctr"/>
-          <a:lstStyle/>
-          <a:p>
-            <a:pPr marL="0" indent="0" algn="r">
-              <a:buNone/>
-              <a:defRPr/>
-            </a:pPr>
-            <a:r>
-              <a:rPr lang="en-US" sz="1250" b="1">
-                <a:solidFill>
-                  <a:srgbClr val="FFFFFF"/>
-                </a:solidFill>
-                <a:latin typeface="Calibri"/>
-                <a:ea typeface="Calibri"/>
-                <a:cs typeface="Calibri"/>
-              </a:rPr>
-              <a:t>CSC3107 · Information Visualization</a:t>
-            </a:r>
-            <a:endParaRPr lang="en-US" sz="1250"/>
-          </a:p>
-          <a:p>
-            <a:pPr marL="0" indent="0" algn="r">
-              <a:buNone/>
-              <a:defRPr/>
-            </a:pPr>
-            <a:r>
-              <a:rPr lang="en-US" sz="1100">
-                <a:solidFill>
-                  <a:srgbClr val="C7D6EC"/>
-                </a:solidFill>
-                <a:latin typeface="Calibri"/>
-                <a:ea typeface="Calibri"/>
-                <a:cs typeface="Calibri"/>
-              </a:rPr>
-              <a:t>Team </a:t>
-            </a:r>
-            <a:r>
-              <a:rPr lang="en-US" sz="1100" b="0" i="0" u="none" strike="noStrike" cap="none" spc="0">
-                <a:solidFill>
-                  <a:srgbClr val="C7D6EC"/>
-                </a:solidFill>
-                <a:latin typeface="Calibri"/>
-                <a:ea typeface="Calibri"/>
-                <a:cs typeface="Calibri"/>
-              </a:rPr>
-              <a:t>Lavender</a:t>
-            </a:r>
-            <a:r>
-              <a:rPr lang="en-US" sz="1100">
-                <a:solidFill>
-                  <a:srgbClr val="C7D6EC"/>
-                </a:solidFill>
-                <a:latin typeface="Calibri"/>
-                <a:ea typeface="Calibri"/>
-                <a:cs typeface="Calibri"/>
-              </a:rPr>
-              <a:t> · Poster Project</a:t>
-            </a:r>
-            <a:endParaRPr lang="en-US" sz="1250"/>
-          </a:p>
-        </p:txBody>
-      </p:sp>
-      <p:sp>
-        <p:nvSpPr>
-          <p:cNvPr id="1852113362" name="Shape 4"/>
-          <p:cNvSpPr/>
-          <p:nvPr/>
-        </p:nvSpPr>
-        <p:spPr bwMode="auto">
           <a:xfrm flipH="0" flipV="0">
-            <a:off x="329183" y="1125266"/>
-            <a:ext cx="3246120" cy="3252527"/>
+            <a:off x="9185033" y="3890007"/>
+            <a:ext cx="2898648" cy="812707"/>
           </a:xfrm>
           <a:prstGeom prst="roundRect">
             <a:avLst>
-              <a:gd name="adj" fmla="val 2182"/>
+              <a:gd name="adj" fmla="val 3871"/>
             </a:avLst>
           </a:prstGeom>
           <a:solidFill>
@@ -1117,14 +2016,14 @@
       </p:sp>
       <p:sp>
         <p:nvSpPr>
-          <p:cNvPr id="992004260" name="Text 5"/>
+          <p:cNvPr id="1961550023" name="Text 26"/>
           <p:cNvSpPr/>
           <p:nvPr/>
         </p:nvSpPr>
         <p:spPr bwMode="auto">
           <a:xfrm>
-            <a:off x="484632" y="1234994"/>
-            <a:ext cx="2916936" cy="274320"/>
+            <a:off x="9349627" y="3981447"/>
+            <a:ext cx="2569464" cy="274320"/>
           </a:xfrm>
           <a:prstGeom prst="rect">
             <a:avLst/>
@@ -1143,28 +2042,32 @@
             <a:r>
               <a:rPr lang="en-US" sz="1250" b="1" spc="150">
                 <a:solidFill>
-                  <a:srgbClr val="0E7C86"/>
+                  <a:srgbClr val="734F96"/>
                 </a:solidFill>
                 <a:latin typeface="Cambria"/>
                 <a:ea typeface="Cambria"/>
                 <a:cs typeface="Cambria"/>
               </a:rPr>
-              <a:t>THE ORIGINAL</a:t>
-            </a:r>
-            <a:endParaRPr lang="en-US" sz="1250"/>
+              <a:t>DATA</a:t>
+            </a:r>
+            <a:endParaRPr sz="1250">
+              <a:solidFill>
+                <a:srgbClr val="734F96"/>
+              </a:solidFill>
+            </a:endParaRPr>
           </a:p>
         </p:txBody>
       </p:sp>
       <p:sp>
         <p:nvSpPr>
-          <p:cNvPr id="984502747" name="Text 6"/>
+          <p:cNvPr id="1260349692" name="Text 27"/>
           <p:cNvSpPr/>
           <p:nvPr/>
         </p:nvSpPr>
         <p:spPr bwMode="auto">
-          <a:xfrm>
-            <a:off x="484632" y="1527602"/>
-            <a:ext cx="2916936" cy="566928"/>
+          <a:xfrm flipH="0" flipV="0">
+            <a:off x="9349625" y="4291439"/>
+            <a:ext cx="2569463" cy="388484"/>
           </a:xfrm>
           <a:prstGeom prst="rect">
             <a:avLst/>
@@ -1177,38 +2080,101 @@
           <a:lstStyle/>
           <a:p>
             <a:pPr marL="0" indent="0">
+              <a:lnSpc>
+                <a:spcPct val="103000"/>
+              </a:lnSpc>
               <a:buNone/>
               <a:defRPr/>
             </a:pPr>
             <a:r>
-              <a:rPr lang="en-US" sz="1000">
-                <a:solidFill>
-                  <a:srgbClr val="1B2A4A"/>
-                </a:solidFill>
-                <a:latin typeface="Calibri"/>
-                <a:ea typeface="Calibri"/>
-                <a:cs typeface="Calibri"/>
-              </a:rPr>
-              <a:t>Visual Capitalist encodes each country's GDP as the area of a Voronoi-treemap cell, coloured by region.</a:t>
-            </a:r>
-            <a:endParaRPr lang="en-US" sz="1000"/>
+              <a:rPr lang="en-US" sz="900" b="1" u="sng">
+                <a:solidFill>
+                  <a:srgbClr val="000000"/>
+                </a:solidFill>
+                <a:latin typeface="Calibri"/>
+                <a:ea typeface="Calibri"/>
+                <a:cs typeface="Calibri"/>
+                <a:hlinkClick r:id="rId3" tooltip=""/>
+              </a:rPr>
+              <a:t>IMF WEO Apr 2026</a:t>
+            </a:r>
+            <a:r>
+              <a:rPr lang="en-US" sz="900" b="0">
+                <a:solidFill>
+                  <a:srgbClr val="000000"/>
+                </a:solidFill>
+                <a:latin typeface="Calibri"/>
+                <a:ea typeface="Calibri"/>
+                <a:cs typeface="Calibri"/>
+              </a:rPr>
+              <a:t> (NGDPD): Nominal GDP</a:t>
+            </a:r>
+            <a:endParaRPr sz="900" b="0">
+              <a:solidFill>
+                <a:srgbClr val="000000"/>
+              </a:solidFill>
+              <a:latin typeface="Calibri"/>
+              <a:ea typeface="Calibri"/>
+              <a:cs typeface="Calibri"/>
+            </a:endParaRPr>
+          </a:p>
+          <a:p>
+            <a:pPr marL="0" indent="0">
+              <a:lnSpc>
+                <a:spcPct val="103000"/>
+              </a:lnSpc>
+              <a:buNone/>
+              <a:defRPr/>
+            </a:pPr>
+            <a:r>
+              <a:rPr lang="en-US" sz="900" b="1" u="sng">
+                <a:solidFill>
+                  <a:schemeClr val="hlink"/>
+                </a:solidFill>
+                <a:latin typeface="Calibri"/>
+                <a:ea typeface="Calibri"/>
+                <a:cs typeface="Calibri"/>
+                <a:hlinkClick r:id="rId4" tooltip=""/>
+              </a:rPr>
+              <a:t>World Bank WDI</a:t>
+            </a:r>
+            <a:r>
+              <a:rPr lang="en-US" sz="900"/>
+              <a:t> (</a:t>
+            </a:r>
+            <a:r>
+              <a:rPr lang="en-US" sz="900" b="0" i="0" u="none" strike="noStrike" cap="none" spc="0">
+                <a:solidFill>
+                  <a:schemeClr val="tx1"/>
+                </a:solidFill>
+                <a:latin typeface="Calibri"/>
+                <a:ea typeface="Calibri"/>
+                <a:cs typeface="Calibri"/>
+              </a:rPr>
+              <a:t>SP.POP.TOTL</a:t>
+            </a:r>
+            <a:r>
+              <a:rPr lang="en-US" sz="900"/>
+              <a:t>): Population</a:t>
+            </a:r>
+            <a:endParaRPr lang="en-US" sz="900"/>
           </a:p>
         </p:txBody>
       </p:sp>
       <p:sp>
         <p:nvSpPr>
-          <p:cNvPr id="2103510975" name="Shape 10"/>
+          <p:cNvPr id="109037292" name="Shape 28"/>
           <p:cNvSpPr/>
           <p:nvPr/>
         </p:nvSpPr>
         <p:spPr bwMode="auto">
-          <a:xfrm>
-            <a:off x="320040" y="4034374"/>
-            <a:ext cx="3246120" cy="2679192"/>
+          <a:xfrm flipH="0" flipV="0">
+            <a:off x="9185034" y="4897509"/>
+            <a:ext cx="2898648" cy="1035141"/>
           </a:xfrm>
           <a:prstGeom prst="roundRect">
             <a:avLst>
-              <a:gd name="adj" fmla="val 2048"/>
+              <a:gd name="adj" fmla="val 5769"/>
             </a:avLst>
           </a:prstGeom>
           <a:solidFill>
@@ -1226,14 +2192,14 @@
       </p:sp>
       <p:sp>
         <p:nvSpPr>
-          <p:cNvPr id="1367505680" name="Text 12"/>
+          <p:cNvPr id="1536205949" name="Text 30"/>
           <p:cNvSpPr/>
           <p:nvPr/>
         </p:nvSpPr>
         <p:spPr bwMode="auto">
           <a:xfrm>
-            <a:off x="484632" y="4808081"/>
-            <a:ext cx="2916936" cy="219456"/>
+            <a:off x="11258298" y="5050532"/>
+            <a:ext cx="713232" cy="713232"/>
           </a:xfrm>
           <a:prstGeom prst="rect">
             <a:avLst/>
@@ -1245,35 +2211,24 @@
           <a:bodyPr wrap="square" lIns="0" tIns="0" rIns="0" bIns="0" rtlCol="0" anchor="ctr"/>
           <a:lstStyle/>
           <a:p>
-            <a:pPr marL="0" indent="0">
+            <a:pPr marL="0" indent="0" algn="ctr">
               <a:buNone/>
               <a:defRPr/>
             </a:pPr>
-            <a:r>
-              <a:rPr lang="en-US" sz="1000" b="1">
-                <a:solidFill>
-                  <a:srgbClr val="0E7C86"/>
-                </a:solidFill>
-                <a:latin typeface="Calibri"/>
-                <a:ea typeface="Calibri"/>
-                <a:cs typeface="Calibri"/>
-              </a:rPr>
-              <a:t>Strengths</a:t>
-            </a:r>
-            <a:endParaRPr lang="en-US" sz="1000"/>
+            <a:endParaRPr lang="en-US" sz="1100"/>
           </a:p>
         </p:txBody>
       </p:sp>
       <p:sp>
         <p:nvSpPr>
-          <p:cNvPr id="981345515" name="Text 13"/>
+          <p:cNvPr id="2016549548" name="Text 31"/>
           <p:cNvSpPr/>
           <p:nvPr/>
         </p:nvSpPr>
         <p:spPr bwMode="auto">
           <a:xfrm>
-            <a:off x="502920" y="4888506"/>
-            <a:ext cx="2898648" cy="713232"/>
+            <a:off x="9349627" y="4970661"/>
+            <a:ext cx="1645920" cy="274320"/>
           </a:xfrm>
           <a:prstGeom prst="rect">
             <a:avLst/>
@@ -1285,280 +2240,6 @@
           <a:bodyPr wrap="square" lIns="0" tIns="0" rIns="0" bIns="0" rtlCol="0" anchor="ctr"/>
           <a:lstStyle/>
           <a:p>
-            <a:pPr marL="342900" indent="-342900">
-              <a:spcAft>
-                <a:spcPts val="200"/>
-              </a:spcAft>
-              <a:buSzPct val="100000"/>
-              <a:buChar char="•"/>
-              <a:defRPr/>
-            </a:pPr>
-            <a:r>
-              <a:rPr lang="en-US" sz="950">
-                <a:solidFill>
-                  <a:srgbClr val="1B2A4A"/>
-                </a:solidFill>
-                <a:latin typeface="Calibri"/>
-                <a:ea typeface="Calibri"/>
-                <a:cs typeface="Calibri"/>
-              </a:rPr>
-              <a:t>High visual salience, draws readers in</a:t>
-            </a:r>
-            <a:endParaRPr lang="en-US" sz="950"/>
-          </a:p>
-          <a:p>
-            <a:pPr marL="342900" indent="-342900">
-              <a:spcAft>
-                <a:spcPts val="200"/>
-              </a:spcAft>
-              <a:buSzPct val="100000"/>
-              <a:buChar char="•"/>
-              <a:defRPr/>
-            </a:pPr>
-            <a:r>
-              <a:rPr lang="en-US" sz="950">
-                <a:solidFill>
-                  <a:srgbClr val="1B2A4A"/>
-                </a:solidFill>
-                <a:latin typeface="Calibri"/>
-                <a:ea typeface="Calibri"/>
-                <a:cs typeface="Calibri"/>
-              </a:rPr>
-              <a:t>Region colour shows macro clusters</a:t>
-            </a:r>
-            <a:endParaRPr lang="en-US" sz="950"/>
-          </a:p>
-          <a:p>
-            <a:pPr marL="342900" indent="-342900">
-              <a:spcAft>
-                <a:spcPts val="200"/>
-              </a:spcAft>
-              <a:buSzPct val="100000"/>
-              <a:buChar char="•"/>
-              <a:defRPr/>
-            </a:pPr>
-            <a:r>
-              <a:rPr lang="en-US" sz="950">
-                <a:solidFill>
-                  <a:srgbClr val="1B2A4A"/>
-                </a:solidFill>
-                <a:latin typeface="Calibri"/>
-                <a:ea typeface="Calibri"/>
-                <a:cs typeface="Calibri"/>
-              </a:rPr>
-              <a:t>Sortable companion table for exact figures.</a:t>
-            </a:r>
-            <a:endParaRPr lang="en-US" sz="950"/>
-          </a:p>
-        </p:txBody>
-      </p:sp>
-      <p:sp>
-        <p:nvSpPr>
-          <p:cNvPr id="2033804880" name="Text 14"/>
-          <p:cNvSpPr/>
-          <p:nvPr/>
-        </p:nvSpPr>
-        <p:spPr bwMode="auto">
-          <a:xfrm>
-            <a:off x="484632" y="5576731"/>
-            <a:ext cx="2916936" cy="219456"/>
-          </a:xfrm>
-          <a:prstGeom prst="rect">
-            <a:avLst/>
-          </a:prstGeom>
-          <a:noFill/>
-          <a:ln/>
-        </p:spPr>
-        <p:txBody>
-          <a:bodyPr wrap="square" lIns="0" tIns="0" rIns="0" bIns="0" rtlCol="0" anchor="ctr"/>
-          <a:lstStyle/>
-          <a:p>
-            <a:pPr marL="0" indent="0">
-              <a:buNone/>
-              <a:defRPr/>
-            </a:pPr>
-            <a:r>
-              <a:rPr lang="en-US" sz="1000" b="1">
-                <a:solidFill>
-                  <a:srgbClr val="C0392B"/>
-                </a:solidFill>
-                <a:latin typeface="Calibri"/>
-                <a:ea typeface="Calibri"/>
-                <a:cs typeface="Calibri"/>
-              </a:rPr>
-              <a:t>Weakness</a:t>
-            </a:r>
-            <a:endParaRPr lang="en-US" sz="1000"/>
-          </a:p>
-        </p:txBody>
-      </p:sp>
-      <p:sp>
-        <p:nvSpPr>
-          <p:cNvPr id="1064971789" name="Text 15"/>
-          <p:cNvSpPr/>
-          <p:nvPr/>
-        </p:nvSpPr>
-        <p:spPr bwMode="auto">
-          <a:xfrm>
-            <a:off x="502920" y="5613861"/>
-            <a:ext cx="2898648" cy="1097280"/>
-          </a:xfrm>
-          <a:prstGeom prst="rect">
-            <a:avLst/>
-          </a:prstGeom>
-          <a:noFill/>
-          <a:ln/>
-        </p:spPr>
-        <p:txBody>
-          <a:bodyPr wrap="square" lIns="0" tIns="0" rIns="0" bIns="0" rtlCol="0" anchor="ctr"/>
-          <a:lstStyle/>
-          <a:p>
-            <a:pPr marL="342900" indent="-342900">
-              <a:spcAft>
-                <a:spcPts val="200"/>
-              </a:spcAft>
-              <a:buSzPct val="100000"/>
-              <a:buChar char="•"/>
-              <a:defRPr/>
-            </a:pPr>
-            <a:r>
-              <a:rPr lang="en-US" sz="950">
-                <a:solidFill>
-                  <a:srgbClr val="1B2A4A"/>
-                </a:solidFill>
-                <a:latin typeface="Calibri"/>
-                <a:ea typeface="Calibri"/>
-                <a:cs typeface="Calibri"/>
-              </a:rPr>
-              <a:t>Area is hard to compare precisely</a:t>
-            </a:r>
-            <a:endParaRPr lang="en-US" sz="950"/>
-          </a:p>
-          <a:p>
-            <a:pPr marL="342900" indent="-342900">
-              <a:spcAft>
-                <a:spcPts val="200"/>
-              </a:spcAft>
-              <a:buSzPct val="100000"/>
-              <a:buChar char="•"/>
-              <a:defRPr/>
-            </a:pPr>
-            <a:r>
-              <a:rPr lang="en-US" sz="950">
-                <a:solidFill>
-                  <a:srgbClr val="1B2A4A"/>
-                </a:solidFill>
-                <a:latin typeface="Calibri"/>
-                <a:ea typeface="Calibri"/>
-                <a:cs typeface="Calibri"/>
-              </a:rPr>
-              <a:t>Region colours repeat / look alike</a:t>
-            </a:r>
-            <a:endParaRPr lang="en-US" sz="950"/>
-          </a:p>
-          <a:p>
-            <a:pPr marL="342900" indent="-342900">
-              <a:spcAft>
-                <a:spcPts val="200"/>
-              </a:spcAft>
-              <a:buSzPct val="100000"/>
-              <a:buChar char="•"/>
-              <a:defRPr/>
-            </a:pPr>
-            <a:r>
-              <a:rPr lang="en-US" sz="950">
-                <a:solidFill>
-                  <a:srgbClr val="1B2A4A"/>
-                </a:solidFill>
-                <a:latin typeface="Calibri"/>
-                <a:ea typeface="Calibri"/>
-                <a:cs typeface="Calibri"/>
-              </a:rPr>
-              <a:t>No ranking, per-capita, or trend</a:t>
-            </a:r>
-            <a:endParaRPr lang="en-US" sz="950">
-              <a:solidFill>
-                <a:srgbClr val="1B2A4A"/>
-              </a:solidFill>
-              <a:latin typeface="Calibri"/>
-              <a:ea typeface="Calibri"/>
-              <a:cs typeface="Calibri"/>
-            </a:endParaRPr>
-          </a:p>
-          <a:p>
-            <a:pPr marL="342900" indent="-342900">
-              <a:spcAft>
-                <a:spcPts val="199"/>
-              </a:spcAft>
-              <a:buSzPct val="100000"/>
-              <a:buChar char="•"/>
-              <a:defRPr/>
-            </a:pPr>
-            <a:r>
-              <a:rPr lang="en-US" sz="950" b="0" i="0" u="none" strike="noStrike" cap="none" spc="0">
-                <a:solidFill>
-                  <a:srgbClr val="1B2A4A"/>
-                </a:solidFill>
-                <a:latin typeface="Calibri"/>
-                <a:ea typeface="Calibri"/>
-                <a:cs typeface="Calibri"/>
-              </a:rPr>
-              <a:t>One year's data cannot prove Asia's shifting economic weight</a:t>
-            </a:r>
-            <a:endParaRPr lang="en-US" sz="950"/>
-          </a:p>
-        </p:txBody>
-      </p:sp>
-      <p:sp>
-        <p:nvSpPr>
-          <p:cNvPr id="1776864968" name="Shape 16"/>
-          <p:cNvSpPr/>
-          <p:nvPr/>
-        </p:nvSpPr>
-        <p:spPr bwMode="auto">
-          <a:xfrm flipH="0" flipV="0">
-            <a:off x="3698470" y="1125266"/>
-            <a:ext cx="5152006" cy="5588300"/>
-          </a:xfrm>
-          <a:prstGeom prst="roundRect">
-            <a:avLst>
-              <a:gd name="adj" fmla="val 1081"/>
-            </a:avLst>
-          </a:prstGeom>
-          <a:solidFill>
-            <a:srgbClr val="FFFFFF"/>
-          </a:solidFill>
-          <a:ln/>
-          <a:effectLst>
-            <a:outerShdw blurRad="88900" dist="38100" dir="5400000" sx="100000" sy="100000" kx="0" ky="0" algn="bl" rotWithShape="0">
-              <a:srgbClr val="8AA0BE">
-                <a:alpha val="22000"/>
-              </a:srgbClr>
-            </a:outerShdw>
-          </a:effectLst>
-        </p:spPr>
-      </p:sp>
-      <p:sp>
-        <p:nvSpPr>
-          <p:cNvPr id="585718508" name="Text 17"/>
-          <p:cNvSpPr/>
-          <p:nvPr/>
-        </p:nvSpPr>
-        <p:spPr bwMode="auto">
-          <a:xfrm>
-            <a:off x="3886200" y="1234994"/>
-            <a:ext cx="4709160" cy="274320"/>
-          </a:xfrm>
-          <a:prstGeom prst="rect">
-            <a:avLst/>
-          </a:prstGeom>
-          <a:noFill/>
-          <a:ln/>
-        </p:spPr>
-        <p:txBody>
-          <a:bodyPr wrap="square" lIns="0" tIns="0" rIns="0" bIns="0" rtlCol="0" anchor="ctr"/>
-          <a:lstStyle/>
-          <a:p>
             <a:pPr marL="0" indent="0" algn="l">
               <a:buNone/>
               <a:defRPr/>
@@ -1566,857 +2247,25 @@
             <a:r>
               <a:rPr lang="en-US" sz="1250" b="1" spc="150">
                 <a:solidFill>
-                  <a:srgbClr val="0E7C86"/>
+                  <a:srgbClr val="734F96"/>
                 </a:solidFill>
                 <a:latin typeface="Cambria"/>
                 <a:ea typeface="Cambria"/>
                 <a:cs typeface="Cambria"/>
               </a:rPr>
-              <a:t>OUR REDESIGN</a:t>
-            </a:r>
-            <a:endParaRPr lang="en-US" sz="1250"/>
-          </a:p>
-        </p:txBody>
-      </p:sp>
-      <p:sp>
-        <p:nvSpPr>
-          <p:cNvPr id="1231436206" name="Text 20"/>
-          <p:cNvSpPr/>
-          <p:nvPr/>
-        </p:nvSpPr>
-        <p:spPr bwMode="auto">
-          <a:xfrm flipH="0" flipV="0">
-            <a:off x="3842903" y="4682423"/>
-            <a:ext cx="1535277" cy="274320"/>
-          </a:xfrm>
-          <a:prstGeom prst="rect">
-            <a:avLst/>
-          </a:prstGeom>
-          <a:noFill/>
-          <a:ln/>
-        </p:spPr>
-        <p:txBody>
-          <a:bodyPr wrap="square" lIns="0" tIns="0" rIns="0" bIns="0" rtlCol="0" anchor="ctr"/>
-          <a:lstStyle/>
-          <a:p>
-            <a:pPr marL="0" indent="0" algn="l">
-              <a:buNone/>
-              <a:defRPr/>
-            </a:pPr>
-            <a:r>
-              <a:rPr lang="en-US" sz="1250" b="1" spc="150">
-                <a:solidFill>
-                  <a:srgbClr val="0E7C86"/>
-                </a:solidFill>
-                <a:latin typeface="Cambria"/>
-                <a:ea typeface="Cambria"/>
-                <a:cs typeface="Cambria"/>
-              </a:rPr>
-              <a:t>WHAT CHANGED</a:t>
-            </a:r>
-            <a:endParaRPr lang="en-US" sz="1250"/>
-          </a:p>
-        </p:txBody>
-      </p:sp>
-      <p:sp>
-        <p:nvSpPr>
-          <p:cNvPr id="945083772" name="Text 21"/>
-          <p:cNvSpPr/>
-          <p:nvPr/>
-        </p:nvSpPr>
-        <p:spPr bwMode="auto">
-          <a:xfrm flipH="0" flipV="0">
-            <a:off x="3861191" y="5173220"/>
-            <a:ext cx="2354579" cy="1097280"/>
-          </a:xfrm>
-          <a:prstGeom prst="rect">
-            <a:avLst/>
-          </a:prstGeom>
-          <a:noFill/>
-          <a:ln/>
-        </p:spPr>
-        <p:txBody>
-          <a:bodyPr wrap="square" lIns="0" tIns="0" rIns="0" bIns="0" rtlCol="0" anchor="ctr"/>
-          <a:lstStyle/>
-          <a:p>
-            <a:pPr marL="342900" indent="-342900">
-              <a:spcAft>
-                <a:spcPts val="250"/>
-              </a:spcAft>
-              <a:buSzPct val="100000"/>
-              <a:buChar char="•"/>
-              <a:defRPr/>
-            </a:pPr>
-            <a:r>
-              <a:rPr lang="en-US" sz="950">
-                <a:solidFill>
-                  <a:srgbClr val="1B2A4A"/>
-                </a:solidFill>
-                <a:latin typeface="Calibri"/>
-                <a:ea typeface="Calibri"/>
-                <a:cs typeface="Calibri"/>
-              </a:rPr>
-              <a:t>Ranked bars replace areas</a:t>
-            </a:r>
-            <a:endParaRPr sz="950"/>
-          </a:p>
-          <a:p>
-            <a:pPr marL="342900" indent="-342900">
-              <a:spcAft>
-                <a:spcPts val="250"/>
-              </a:spcAft>
-              <a:buSzPct val="100000"/>
-              <a:buChar char="•"/>
-              <a:defRPr/>
-            </a:pPr>
-            <a:r>
-              <a:rPr lang="en-US" sz="950">
-                <a:solidFill>
-                  <a:srgbClr val="1B2A4A"/>
-                </a:solidFill>
-                <a:latin typeface="Calibri"/>
-                <a:ea typeface="Calibri"/>
-                <a:cs typeface="Calibri"/>
-              </a:rPr>
-              <a:t>One consistent unit (USD trillions) across the whole chart</a:t>
-            </a:r>
-            <a:endParaRPr sz="950"/>
-          </a:p>
-          <a:p>
-            <a:pPr marL="342900" indent="-342900">
-              <a:spcAft>
-                <a:spcPts val="250"/>
-              </a:spcAft>
-              <a:buSzPct val="100000"/>
-              <a:buChar char="•"/>
-              <a:defRPr/>
-            </a:pPr>
-            <a:r>
-              <a:rPr lang="en-US" sz="950">
-                <a:solidFill>
-                  <a:srgbClr val="1B2A4A"/>
-                </a:solidFill>
-                <a:latin typeface="Calibri"/>
-                <a:ea typeface="Calibri"/>
-                <a:cs typeface="Calibri"/>
-              </a:rPr>
-              <a:t>Colour-blind-safe palette: one distinct hue per region</a:t>
-            </a:r>
-            <a:endParaRPr sz="950"/>
-          </a:p>
-          <a:p>
-            <a:pPr marL="342900" indent="-342900">
-              <a:spcAft>
-                <a:spcPts val="250"/>
-              </a:spcAft>
-              <a:buSzPct val="100000"/>
-              <a:buChar char="•"/>
-              <a:defRPr/>
-            </a:pPr>
-            <a:r>
-              <a:rPr lang="en-US" sz="950">
-                <a:solidFill>
-                  <a:srgbClr val="1B2A4A"/>
-                </a:solidFill>
-                <a:latin typeface="Calibri"/>
-                <a:ea typeface="Calibri"/>
-                <a:cs typeface="Calibri"/>
-              </a:rPr>
-              <a:t>GDP per capita separates market size from prosperity</a:t>
-            </a:r>
-            <a:endParaRPr sz="950"/>
-          </a:p>
-          <a:p>
-            <a:pPr marL="342900" indent="-342900">
-              <a:spcAft>
-                <a:spcPts val="250"/>
-              </a:spcAft>
-              <a:buSzPct val="100000"/>
-              <a:buChar char="•"/>
-              <a:defRPr/>
-            </a:pPr>
-            <a:r>
-              <a:rPr lang="en-US" sz="950">
-                <a:solidFill>
-                  <a:srgbClr val="1B2A4A"/>
-                </a:solidFill>
-                <a:latin typeface="Calibri"/>
-                <a:ea typeface="Calibri"/>
-                <a:cs typeface="Calibri"/>
-              </a:rPr>
-              <a:t>Showing of “Asia shift”story by adding GDP Share by Region panel</a:t>
-            </a:r>
-            <a:endParaRPr lang="en-US" sz="1000"/>
-          </a:p>
-        </p:txBody>
-      </p:sp>
-      <p:sp>
-        <p:nvSpPr>
-          <p:cNvPr id="762979647" name="Shape 22"/>
-          <p:cNvSpPr/>
-          <p:nvPr/>
-        </p:nvSpPr>
-        <p:spPr bwMode="auto">
-          <a:xfrm flipH="0" flipV="0">
-            <a:off x="8942831" y="1125266"/>
-            <a:ext cx="2898648" cy="3382867"/>
-          </a:xfrm>
-          <a:prstGeom prst="roundRect">
-            <a:avLst>
-              <a:gd name="adj" fmla="val 2034"/>
-            </a:avLst>
-          </a:prstGeom>
-          <a:solidFill>
-            <a:srgbClr val="1B2A4A"/>
-          </a:solidFill>
-          <a:ln/>
-          <a:effectLst>
-            <a:outerShdw blurRad="88900" dist="38100" dir="5400000" sx="100000" sy="100000" kx="0" ky="0" algn="bl" rotWithShape="0">
-              <a:srgbClr val="8AA0BE">
-                <a:alpha val="22000"/>
-              </a:srgbClr>
-            </a:outerShdw>
-          </a:effectLst>
-        </p:spPr>
-      </p:sp>
-      <p:sp>
-        <p:nvSpPr>
-          <p:cNvPr id="143457906" name="Text 23"/>
-          <p:cNvSpPr/>
-          <p:nvPr/>
-        </p:nvSpPr>
-        <p:spPr bwMode="auto">
-          <a:xfrm>
-            <a:off x="9107424" y="1234994"/>
-            <a:ext cx="2569464" cy="274320"/>
-          </a:xfrm>
-          <a:prstGeom prst="rect">
-            <a:avLst/>
-          </a:prstGeom>
-          <a:noFill/>
-          <a:ln/>
-        </p:spPr>
-        <p:txBody>
-          <a:bodyPr wrap="square" lIns="0" tIns="0" rIns="0" bIns="0" rtlCol="0" anchor="ctr"/>
-          <a:lstStyle/>
-          <a:p>
-            <a:pPr marL="0" indent="0">
-              <a:buNone/>
-              <a:defRPr/>
-            </a:pPr>
-            <a:r>
-              <a:rPr lang="en-US" sz="1250" b="1" spc="150">
-                <a:solidFill>
-                  <a:srgbClr val="FFFFFF"/>
-                </a:solidFill>
-                <a:latin typeface="Cambria"/>
-                <a:ea typeface="Cambria"/>
-                <a:cs typeface="Cambria"/>
-              </a:rPr>
-              <a:t>DESIGN BRIEF</a:t>
-            </a:r>
-            <a:endParaRPr lang="en-US" sz="1250"/>
-          </a:p>
-        </p:txBody>
-      </p:sp>
-      <p:sp>
-        <p:nvSpPr>
-          <p:cNvPr id="1453534900" name="Text 24"/>
-          <p:cNvSpPr/>
-          <p:nvPr/>
-        </p:nvSpPr>
-        <p:spPr bwMode="auto">
-          <a:xfrm>
-            <a:off x="9107424" y="1527602"/>
-            <a:ext cx="2569464" cy="2212848"/>
-          </a:xfrm>
-          <a:prstGeom prst="rect">
-            <a:avLst/>
-          </a:prstGeom>
-          <a:noFill/>
-          <a:ln/>
-        </p:spPr>
-        <p:txBody>
-          <a:bodyPr wrap="square" lIns="0" tIns="0" rIns="0" bIns="0" rtlCol="0" anchor="t"/>
-          <a:lstStyle/>
-          <a:p>
-            <a:pPr>
-              <a:defRPr/>
-            </a:pPr>
-            <a:r>
-              <a:rPr lang="en-US" sz="950" b="0" i="0" u="none" strike="noStrike" cap="none" spc="0">
-                <a:solidFill>
-                  <a:srgbClr val="EAF1FB"/>
-                </a:solidFill>
-                <a:latin typeface="Calibri"/>
-                <a:ea typeface="Calibri"/>
-                <a:cs typeface="Calibri"/>
-              </a:rPr>
-              <a:t>This redesign is intended for economic and trade-policy analysts prioritizing global markets</a:t>
-            </a:r>
-            <a:endParaRPr lang="en-US" sz="950" b="0" i="0" u="none" strike="noStrike" cap="none" spc="0">
+              <a:t>REFERENCES</a:t>
+            </a:r>
+            <a:endParaRPr sz="1250">
               <a:solidFill>
-                <a:srgbClr val="EAF1FB"/>
+                <a:srgbClr val="734F96"/>
               </a:solidFill>
-              <a:latin typeface="Calibri"/>
-              <a:cs typeface="Calibri"/>
             </a:endParaRPr>
-          </a:p>
-          <a:p>
-            <a:pPr>
-              <a:defRPr/>
-            </a:pPr>
-            <a:r>
-              <a:rPr lang="en-US" sz="950" b="0" i="0" u="none" strike="noStrike" cap="none" spc="0">
-                <a:solidFill>
-                  <a:srgbClr val="EAF1FB"/>
-                </a:solidFill>
-                <a:latin typeface="Calibri"/>
-                <a:ea typeface="Calibri"/>
-                <a:cs typeface="Calibri"/>
-              </a:rPr>
-              <a:t>and trade partnerships.</a:t>
-            </a:r>
-            <a:endParaRPr lang="en-US" sz="950" b="0" i="0" u="none" strike="noStrike" cap="none" spc="0">
-              <a:solidFill>
-                <a:srgbClr val="EAF1FB"/>
-              </a:solidFill>
-              <a:latin typeface="Calibri"/>
-              <a:ea typeface="Calibri"/>
-              <a:cs typeface="Calibri"/>
-            </a:endParaRPr>
-          </a:p>
-          <a:p>
-            <a:pPr>
-              <a:defRPr/>
-            </a:pPr>
-            <a:endParaRPr lang="en-US" sz="950" b="0" i="0" u="none" strike="noStrike" cap="none" spc="0">
-              <a:solidFill>
-                <a:srgbClr val="EAF1FB"/>
-              </a:solidFill>
-              <a:latin typeface="Calibri"/>
-              <a:ea typeface="Calibri"/>
-              <a:cs typeface="Calibri"/>
-            </a:endParaRPr>
-          </a:p>
-          <a:p>
-            <a:pPr>
-              <a:defRPr/>
-            </a:pPr>
-            <a:r>
-              <a:rPr lang="en-US" sz="950" b="0" i="0" u="none" strike="noStrike" cap="none" spc="0">
-                <a:solidFill>
-                  <a:srgbClr val="EAF1FB"/>
-                </a:solidFill>
-                <a:latin typeface="Calibri"/>
-                <a:ea typeface="Calibri"/>
-                <a:cs typeface="Calibri"/>
-              </a:rPr>
-              <a:t>The goal is to clearly rank and compare the total absolute market </a:t>
-            </a:r>
-            <a:r>
-              <a:rPr lang="en-US" sz="950" b="0" i="0" u="none" strike="noStrike" cap="none" spc="0">
-                <a:solidFill>
-                  <a:srgbClr val="EAF1FB"/>
-                </a:solidFill>
-                <a:latin typeface="Calibri"/>
-                <a:ea typeface="Calibri"/>
-                <a:cs typeface="Calibri"/>
-              </a:rPr>
-              <a:t>size of individual economies for the year 2026.</a:t>
-            </a:r>
-            <a:r>
-              <a:rPr lang="en-US" sz="950">
-                <a:solidFill>
-                  <a:srgbClr val="EAF1FB"/>
-                </a:solidFill>
-                <a:latin typeface="Calibri"/>
-                <a:ea typeface="Calibri"/>
-                <a:cs typeface="Calibri"/>
-              </a:rPr>
-              <a:t> </a:t>
-            </a:r>
-            <a:endParaRPr lang="en-US" sz="950">
-              <a:solidFill>
-                <a:srgbClr val="EAF1FB"/>
-              </a:solidFill>
-              <a:latin typeface="Calibri"/>
-              <a:ea typeface="Calibri"/>
-              <a:cs typeface="Calibri"/>
-            </a:endParaRPr>
-          </a:p>
-          <a:p>
-            <a:pPr>
-              <a:defRPr/>
-            </a:pPr>
-            <a:endParaRPr lang="en-US" sz="950">
-              <a:solidFill>
-                <a:srgbClr val="EAF1FB"/>
-              </a:solidFill>
-              <a:latin typeface="Calibri"/>
-              <a:ea typeface="Calibri"/>
-              <a:cs typeface="Calibri"/>
-            </a:endParaRPr>
-          </a:p>
-          <a:p>
-            <a:pPr>
-              <a:defRPr/>
-            </a:pPr>
-            <a:r>
-              <a:rPr lang="en-US" sz="950">
-                <a:solidFill>
-                  <a:srgbClr val="EAF1FB"/>
-                </a:solidFill>
-                <a:latin typeface="Calibri"/>
-                <a:ea typeface="Calibri"/>
-                <a:cs typeface="Calibri"/>
-              </a:rPr>
-              <a:t>In addition, it also aims to show that the economic weight is shifting towards Asia since 2000.</a:t>
-            </a:r>
-            <a:endParaRPr lang="en-US" sz="950" b="0" i="0" u="none" strike="noStrike" cap="none" spc="0">
-              <a:solidFill>
-                <a:srgbClr val="EAF1FB"/>
-              </a:solidFill>
-              <a:latin typeface="Calibri"/>
-              <a:cs typeface="Calibri"/>
-            </a:endParaRPr>
-          </a:p>
-          <a:p>
-            <a:pPr marL="0" indent="0">
-              <a:lnSpc>
-                <a:spcPct val="102000"/>
-              </a:lnSpc>
-              <a:buNone/>
-              <a:defRPr/>
-            </a:pPr>
-            <a:endParaRPr lang="en-US" sz="950">
-              <a:solidFill>
-                <a:srgbClr val="EAF1FB"/>
-              </a:solidFill>
-              <a:latin typeface="Calibri"/>
-              <a:ea typeface="Calibri"/>
-              <a:cs typeface="Calibri"/>
-            </a:endParaRPr>
-          </a:p>
-          <a:p>
-            <a:pPr marL="0" indent="0">
-              <a:lnSpc>
-                <a:spcPct val="102000"/>
-              </a:lnSpc>
-              <a:buNone/>
-              <a:defRPr/>
-            </a:pPr>
-            <a:r>
-              <a:rPr lang="en-US" sz="950" b="1">
-                <a:solidFill>
-                  <a:srgbClr val="8FD4DC"/>
-                </a:solidFill>
-                <a:latin typeface="Calibri"/>
-                <a:ea typeface="Calibri"/>
-                <a:cs typeface="Calibri"/>
-              </a:rPr>
-              <a:t>Revisions: </a:t>
-            </a:r>
-            <a:endParaRPr lang="en-US" sz="950">
-              <a:solidFill>
-                <a:srgbClr val="EAF1FB"/>
-              </a:solidFill>
-              <a:latin typeface="Calibri"/>
-              <a:ea typeface="Calibri"/>
-              <a:cs typeface="Calibri"/>
-            </a:endParaRPr>
-          </a:p>
-          <a:p>
-            <a:pPr marL="190257" indent="-190257">
-              <a:lnSpc>
-                <a:spcPct val="102000"/>
-              </a:lnSpc>
-              <a:buFont typeface="Arial"/>
-              <a:buChar char="•"/>
-              <a:defRPr/>
-            </a:pPr>
-            <a:r>
-              <a:rPr lang="en-US" sz="950">
-                <a:solidFill>
-                  <a:srgbClr val="EAF1FB"/>
-                </a:solidFill>
-                <a:latin typeface="Calibri"/>
-                <a:ea typeface="Calibri"/>
-                <a:cs typeface="Calibri"/>
-              </a:rPr>
-              <a:t>Side by side horizontal bar chart comparison for nominal GDP and individual affluence</a:t>
-            </a:r>
-            <a:endParaRPr lang="en-US" sz="950">
-              <a:solidFill>
-                <a:srgbClr val="EAF1FB"/>
-              </a:solidFill>
-              <a:latin typeface="Calibri"/>
-              <a:ea typeface="Calibri"/>
-              <a:cs typeface="Calibri"/>
-            </a:endParaRPr>
-          </a:p>
-          <a:p>
-            <a:pPr marL="190257" indent="-190257">
-              <a:lnSpc>
-                <a:spcPct val="102000"/>
-              </a:lnSpc>
-              <a:buFont typeface="Arial"/>
-              <a:buChar char="•"/>
-              <a:defRPr/>
-            </a:pPr>
-            <a:r>
-              <a:rPr lang="en-US" sz="950">
-                <a:solidFill>
-                  <a:srgbClr val="EAF1FB"/>
-                </a:solidFill>
-                <a:latin typeface="Calibri"/>
-                <a:ea typeface="Calibri"/>
-                <a:cs typeface="Calibri"/>
-              </a:rPr>
-              <a:t>Line chart to show the GDP share by region trend</a:t>
-            </a:r>
-            <a:endParaRPr lang="en-US" sz="950">
-              <a:solidFill>
-                <a:srgbClr val="EAF1FB"/>
-              </a:solidFill>
-              <a:latin typeface="Calibri"/>
-              <a:ea typeface="Calibri"/>
-              <a:cs typeface="Calibri"/>
-            </a:endParaRPr>
-          </a:p>
-          <a:p>
-            <a:pPr marL="190257" indent="-190257">
-              <a:lnSpc>
-                <a:spcPct val="102000"/>
-              </a:lnSpc>
-              <a:buFont typeface="Arial"/>
-              <a:buChar char="•"/>
-              <a:defRPr/>
-            </a:pPr>
-            <a:r>
-              <a:rPr lang="en-US" sz="950">
-                <a:solidFill>
-                  <a:srgbClr val="EAF1FB"/>
-                </a:solidFill>
-                <a:latin typeface="Calibri"/>
-                <a:ea typeface="Calibri"/>
-                <a:cs typeface="Calibri"/>
-              </a:rPr>
-              <a:t>Distinct colour palette for each region</a:t>
-            </a:r>
-            <a:endParaRPr lang="en-US" sz="950">
-              <a:solidFill>
-                <a:srgbClr val="EAF1FB"/>
-              </a:solidFill>
-              <a:latin typeface="Calibri"/>
-              <a:ea typeface="Calibri"/>
-              <a:cs typeface="Calibri"/>
-            </a:endParaRPr>
-          </a:p>
-          <a:p>
-            <a:pPr marL="190257" indent="-190257">
-              <a:lnSpc>
-                <a:spcPct val="102000"/>
-              </a:lnSpc>
-              <a:buFont typeface="Arial"/>
-              <a:buChar char="•"/>
-              <a:defRPr/>
-            </a:pPr>
-            <a:r>
-              <a:rPr lang="en-US" sz="950">
-                <a:solidFill>
-                  <a:srgbClr val="EAF1FB"/>
-                </a:solidFill>
-                <a:latin typeface="Calibri"/>
-                <a:ea typeface="Calibri"/>
-                <a:cs typeface="Calibri"/>
-              </a:rPr>
-              <a:t>Standardized units in USD trillions</a:t>
-            </a:r>
-            <a:endParaRPr lang="en-US" sz="950">
-              <a:solidFill>
-                <a:srgbClr val="EAF1FB"/>
-              </a:solidFill>
-              <a:latin typeface="Calibri"/>
-              <a:ea typeface="Calibri"/>
-              <a:cs typeface="Calibri"/>
-            </a:endParaRPr>
-          </a:p>
-        </p:txBody>
-      </p:sp>
-      <p:sp>
-        <p:nvSpPr>
-          <p:cNvPr id="1862620845" name="Shape 25"/>
-          <p:cNvSpPr/>
-          <p:nvPr/>
-        </p:nvSpPr>
-        <p:spPr bwMode="auto">
-          <a:xfrm flipH="0" flipV="0">
-            <a:off x="8942830" y="4668496"/>
-            <a:ext cx="2898648" cy="812707"/>
-          </a:xfrm>
-          <a:prstGeom prst="roundRect">
-            <a:avLst>
-              <a:gd name="adj" fmla="val 3871"/>
-            </a:avLst>
-          </a:prstGeom>
-          <a:solidFill>
-            <a:srgbClr val="FFFFFF"/>
-          </a:solidFill>
-          <a:ln/>
-          <a:effectLst>
-            <a:outerShdw blurRad="88900" dist="38100" dir="5400000" sx="100000" sy="100000" kx="0" ky="0" algn="bl" rotWithShape="0">
-              <a:srgbClr val="8AA0BE">
-                <a:alpha val="22000"/>
-              </a:srgbClr>
-            </a:outerShdw>
-          </a:effectLst>
-        </p:spPr>
-      </p:sp>
-      <p:sp>
-        <p:nvSpPr>
-          <p:cNvPr id="1240629182" name="Text 26"/>
-          <p:cNvSpPr/>
-          <p:nvPr/>
-        </p:nvSpPr>
-        <p:spPr bwMode="auto">
-          <a:xfrm>
-            <a:off x="9107424" y="4759936"/>
-            <a:ext cx="2569464" cy="274320"/>
-          </a:xfrm>
-          <a:prstGeom prst="rect">
-            <a:avLst/>
-          </a:prstGeom>
-          <a:noFill/>
-          <a:ln/>
-        </p:spPr>
-        <p:txBody>
-          <a:bodyPr wrap="square" lIns="0" tIns="0" rIns="0" bIns="0" rtlCol="0" anchor="ctr"/>
-          <a:lstStyle/>
-          <a:p>
-            <a:pPr marL="0" indent="0" algn="l">
-              <a:buNone/>
-              <a:defRPr/>
-            </a:pPr>
-            <a:r>
-              <a:rPr lang="en-US" sz="1250" b="1" spc="150">
-                <a:solidFill>
-                  <a:srgbClr val="0E7C86"/>
-                </a:solidFill>
-                <a:latin typeface="Cambria"/>
-                <a:ea typeface="Cambria"/>
-                <a:cs typeface="Cambria"/>
-              </a:rPr>
-              <a:t>DATA</a:t>
-            </a:r>
-            <a:endParaRPr lang="en-US" sz="1250"/>
-          </a:p>
-        </p:txBody>
-      </p:sp>
-      <p:sp>
-        <p:nvSpPr>
-          <p:cNvPr id="1431158546" name="Text 27"/>
-          <p:cNvSpPr/>
-          <p:nvPr/>
-        </p:nvSpPr>
-        <p:spPr bwMode="auto">
-          <a:xfrm flipH="0" flipV="0">
-            <a:off x="9107422" y="5069929"/>
-            <a:ext cx="2569463" cy="388484"/>
-          </a:xfrm>
-          <a:prstGeom prst="rect">
-            <a:avLst/>
-          </a:prstGeom>
-          <a:noFill/>
-          <a:ln/>
-        </p:spPr>
-        <p:txBody>
-          <a:bodyPr wrap="square" lIns="0" tIns="0" rIns="0" bIns="0" rtlCol="0" anchor="t"/>
-          <a:lstStyle/>
-          <a:p>
-            <a:pPr marL="0" indent="0">
-              <a:lnSpc>
-                <a:spcPct val="103000"/>
-              </a:lnSpc>
-              <a:buNone/>
-              <a:defRPr/>
-            </a:pPr>
-            <a:r>
-              <a:rPr lang="en-US" sz="900" b="1" u="sng">
-                <a:solidFill>
-                  <a:srgbClr val="000000"/>
-                </a:solidFill>
-                <a:latin typeface="Calibri"/>
-                <a:ea typeface="Calibri"/>
-                <a:cs typeface="Calibri"/>
-                <a:hlinkClick r:id="rId3" tooltip=""/>
-              </a:rPr>
-              <a:t>IMF WEO Apr 2026</a:t>
-            </a:r>
-            <a:r>
-              <a:rPr lang="en-US" sz="900" b="0">
-                <a:solidFill>
-                  <a:srgbClr val="000000"/>
-                </a:solidFill>
-                <a:latin typeface="Calibri"/>
-                <a:ea typeface="Calibri"/>
-                <a:cs typeface="Calibri"/>
-              </a:rPr>
-              <a:t> (NGDPD): Nominal GDP</a:t>
-            </a:r>
-            <a:endParaRPr sz="900" b="0">
-              <a:solidFill>
-                <a:srgbClr val="000000"/>
-              </a:solidFill>
-              <a:latin typeface="Calibri"/>
-              <a:ea typeface="Calibri"/>
-              <a:cs typeface="Calibri"/>
-            </a:endParaRPr>
-          </a:p>
-          <a:p>
-            <a:pPr marL="0" indent="0">
-              <a:lnSpc>
-                <a:spcPct val="103000"/>
-              </a:lnSpc>
-              <a:buNone/>
-              <a:defRPr/>
-            </a:pPr>
-            <a:r>
-              <a:rPr lang="en-US" sz="900" b="1" u="sng">
-                <a:solidFill>
-                  <a:schemeClr val="hlink"/>
-                </a:solidFill>
-                <a:latin typeface="Calibri"/>
-                <a:ea typeface="Calibri"/>
-                <a:cs typeface="Calibri"/>
-                <a:hlinkClick r:id="rId4" tooltip=""/>
-              </a:rPr>
-              <a:t>World Bank WDI</a:t>
-            </a:r>
-            <a:r>
-              <a:rPr lang="en-US" sz="900"/>
-              <a:t> (</a:t>
-            </a:r>
-            <a:r>
-              <a:rPr lang="en-US" sz="900" b="0" i="0" u="none" strike="noStrike" cap="none" spc="0">
-                <a:solidFill>
-                  <a:schemeClr val="tx1"/>
-                </a:solidFill>
-                <a:latin typeface="Calibri"/>
-                <a:ea typeface="Calibri"/>
-                <a:cs typeface="Calibri"/>
-              </a:rPr>
-              <a:t>SP.POP.TOTL</a:t>
-            </a:r>
-            <a:r>
-              <a:rPr lang="en-US" sz="900"/>
-              <a:t>): Population</a:t>
-            </a:r>
-            <a:endParaRPr lang="en-US" sz="900"/>
-          </a:p>
-        </p:txBody>
-      </p:sp>
-      <p:sp>
-        <p:nvSpPr>
-          <p:cNvPr id="557561572" name="Shape 28"/>
-          <p:cNvSpPr/>
-          <p:nvPr/>
-        </p:nvSpPr>
-        <p:spPr bwMode="auto">
-          <a:xfrm flipH="0" flipV="0">
-            <a:off x="8942831" y="5675999"/>
-            <a:ext cx="2898648" cy="1035141"/>
-          </a:xfrm>
-          <a:prstGeom prst="roundRect">
-            <a:avLst>
-              <a:gd name="adj" fmla="val 5769"/>
-            </a:avLst>
-          </a:prstGeom>
-          <a:solidFill>
-            <a:srgbClr val="FFFFFF"/>
-          </a:solidFill>
-          <a:ln/>
-          <a:effectLst>
-            <a:outerShdw blurRad="88900" dist="38100" dir="5400000" sx="100000" sy="100000" kx="0" ky="0" algn="bl" rotWithShape="0">
-              <a:srgbClr val="8AA0BE">
-                <a:alpha val="22000"/>
-              </a:srgbClr>
-            </a:outerShdw>
-          </a:effectLst>
-        </p:spPr>
-      </p:sp>
-      <p:sp>
-        <p:nvSpPr>
-          <p:cNvPr id="533903756" name="Text 30"/>
-          <p:cNvSpPr/>
-          <p:nvPr/>
-        </p:nvSpPr>
-        <p:spPr bwMode="auto">
-          <a:xfrm>
-            <a:off x="11016095" y="5829022"/>
-            <a:ext cx="713232" cy="713232"/>
-          </a:xfrm>
-          <a:prstGeom prst="rect">
-            <a:avLst/>
-          </a:prstGeom>
-          <a:noFill/>
-          <a:ln/>
-        </p:spPr>
-        <p:txBody>
-          <a:bodyPr wrap="square" lIns="0" tIns="0" rIns="0" bIns="0" rtlCol="0" anchor="ctr"/>
-          <a:lstStyle/>
-          <a:p>
-            <a:pPr marL="0" indent="0" algn="ctr">
-              <a:buNone/>
-              <a:defRPr/>
-            </a:pPr>
-            <a:endParaRPr lang="en-US" sz="1100"/>
-          </a:p>
-        </p:txBody>
-      </p:sp>
-      <p:sp>
-        <p:nvSpPr>
-          <p:cNvPr id="1661189671" name="Text 31"/>
-          <p:cNvSpPr/>
-          <p:nvPr/>
-        </p:nvSpPr>
-        <p:spPr bwMode="auto">
-          <a:xfrm>
-            <a:off x="9107424" y="5749151"/>
-            <a:ext cx="1645920" cy="274320"/>
-          </a:xfrm>
-          <a:prstGeom prst="rect">
-            <a:avLst/>
-          </a:prstGeom>
-          <a:noFill/>
-          <a:ln/>
-        </p:spPr>
-        <p:txBody>
-          <a:bodyPr wrap="square" lIns="0" tIns="0" rIns="0" bIns="0" rtlCol="0" anchor="ctr"/>
-          <a:lstStyle/>
-          <a:p>
-            <a:pPr marL="0" indent="0" algn="l">
-              <a:buNone/>
-              <a:defRPr/>
-            </a:pPr>
-            <a:r>
-              <a:rPr lang="en-US" sz="1250" b="1" spc="150">
-                <a:solidFill>
-                  <a:srgbClr val="0E7C86"/>
-                </a:solidFill>
-                <a:latin typeface="Cambria"/>
-                <a:ea typeface="Cambria"/>
-                <a:cs typeface="Cambria"/>
-              </a:rPr>
-              <a:t>REFERENCES</a:t>
-            </a:r>
-            <a:endParaRPr lang="en-US" sz="1250"/>
           </a:p>
         </p:txBody>
       </p:sp>
       <p:pic>
         <p:nvPicPr>
-          <p:cNvPr id="413532961" name=""/>
+          <p:cNvPr id="42172153" name=""/>
           <p:cNvPicPr>
             <a:picLocks noChangeAspect="1"/>
           </p:cNvPicPr>
@@ -2428,8 +2277,8 @@
         </p:blipFill>
         <p:spPr bwMode="auto">
           <a:xfrm flipH="0" flipV="0">
-            <a:off x="3789910" y="1622272"/>
-            <a:ext cx="4983479" cy="2760204"/>
+            <a:off x="3512567" y="627305"/>
+            <a:ext cx="5493772" cy="3042840"/>
           </a:xfrm>
           <a:prstGeom prst="rect">
             <a:avLst/>
@@ -2438,7 +2287,7 @@
       </p:pic>
       <p:pic>
         <p:nvPicPr>
-          <p:cNvPr id="1949313258" name=""/>
+          <p:cNvPr id="503767551" name=""/>
           <p:cNvPicPr>
             <a:picLocks noChangeAspect="1"/>
           </p:cNvPicPr>
@@ -2450,8 +2299,8 @@
         </p:blipFill>
         <p:spPr bwMode="auto">
           <a:xfrm flipH="0" flipV="0">
-            <a:off x="872974" y="1896510"/>
-            <a:ext cx="2149934" cy="2803309"/>
+            <a:off x="465745" y="1291202"/>
+            <a:ext cx="2528593" cy="3297045"/>
           </a:xfrm>
           <a:prstGeom prst="rect">
             <a:avLst/>
@@ -2460,13 +2309,13 @@
       </p:pic>
       <p:sp>
         <p:nvSpPr>
-          <p:cNvPr id="1400488496" name="Text 32"/>
+          <p:cNvPr id="328926577" name="Text 32"/>
           <p:cNvSpPr/>
           <p:nvPr/>
         </p:nvSpPr>
         <p:spPr bwMode="auto">
           <a:xfrm>
-            <a:off x="9107424" y="6063302"/>
+            <a:off x="9349627" y="5284812"/>
             <a:ext cx="1892808" cy="603504"/>
           </a:xfrm>
           <a:prstGeom prst="rect">
@@ -2516,13 +2365,13 @@
       </p:sp>
       <p:sp>
         <p:nvSpPr>
-          <p:cNvPr id="960942459" name="Text 9"/>
+          <p:cNvPr id="870107064" name="Text 9"/>
           <p:cNvSpPr/>
           <p:nvPr/>
         </p:nvSpPr>
         <p:spPr bwMode="auto">
           <a:xfrm>
-            <a:off x="548639" y="4633791"/>
+            <a:off x="357887" y="4504733"/>
             <a:ext cx="2916936" cy="329184"/>
           </a:xfrm>
           <a:prstGeom prst="rect">
@@ -2535,7 +2384,7 @@
           <a:bodyPr wrap="square" lIns="0" tIns="0" rIns="0" bIns="0" rtlCol="0" anchor="ctr"/>
           <a:lstStyle/>
           <a:p>
-            <a:pPr marL="0" indent="0" algn="r">
+            <a:pPr marL="0" indent="0" algn="ctr">
               <a:buNone/>
               <a:defRPr/>
             </a:pPr>
@@ -2556,13 +2405,13 @@
       </p:sp>
       <p:sp>
         <p:nvSpPr>
-          <p:cNvPr id="563618448" name="Text 20"/>
+          <p:cNvPr id="1977316554" name="Text 20"/>
           <p:cNvSpPr/>
           <p:nvPr/>
         </p:nvSpPr>
         <p:spPr bwMode="auto">
           <a:xfrm flipH="0" flipV="0">
-            <a:off x="6317768" y="4682423"/>
+            <a:off x="6473380" y="3990524"/>
             <a:ext cx="1535277" cy="274320"/>
           </a:xfrm>
           <a:prstGeom prst="rect">
@@ -2582,7 +2431,7 @@
             <a:r>
               <a:rPr lang="en-US" sz="1250" b="1" spc="149">
                 <a:solidFill>
-                  <a:srgbClr val="0E7C86"/>
+                  <a:srgbClr val="734F96"/>
                 </a:solidFill>
                 <a:latin typeface="Cambria"/>
                 <a:ea typeface="Cambria"/>
@@ -2590,19 +2439,23 @@
               </a:rPr>
               <a:t>INSIGHTS</a:t>
             </a:r>
-            <a:endParaRPr lang="en-US" sz="1250"/>
+            <a:endParaRPr sz="1250">
+              <a:solidFill>
+                <a:srgbClr val="734F96"/>
+              </a:solidFill>
+            </a:endParaRPr>
           </a:p>
         </p:txBody>
       </p:sp>
       <p:sp>
         <p:nvSpPr>
-          <p:cNvPr id="1023810051" name="Text 21"/>
+          <p:cNvPr id="348428188" name="Text 21"/>
           <p:cNvSpPr/>
           <p:nvPr/>
         </p:nvSpPr>
         <p:spPr bwMode="auto">
           <a:xfrm flipH="0" flipV="0">
-            <a:off x="6284074" y="4855462"/>
+            <a:off x="6439686" y="4163563"/>
             <a:ext cx="2514322" cy="1097280"/>
           </a:xfrm>
           <a:prstGeom prst="rect">
@@ -2693,6 +2546,75 @@
               <a:defRPr/>
             </a:pPr>
             <a:endParaRPr lang="en-US" sz="1000"/>
+          </a:p>
+        </p:txBody>
+      </p:sp>
+      <p:sp>
+        <p:nvSpPr>
+          <p:cNvPr id="887850403" name="Text 17"/>
+          <p:cNvSpPr/>
+          <p:nvPr/>
+        </p:nvSpPr>
+        <p:spPr bwMode="auto">
+          <a:xfrm flipH="0" flipV="0">
+            <a:off x="9434106" y="6333951"/>
+            <a:ext cx="2400506" cy="274320"/>
+          </a:xfrm>
+          <a:prstGeom prst="rect">
+            <a:avLst/>
+          </a:prstGeom>
+          <a:noFill/>
+          <a:ln/>
+        </p:spPr>
+        <p:txBody>
+          <a:bodyPr wrap="square" lIns="0" tIns="0" rIns="0" bIns="0" rtlCol="0" anchor="ctr"/>
+          <a:lstStyle/>
+          <a:p>
+            <a:pPr marL="0" indent="0" algn="ctr">
+              <a:buNone/>
+              <a:defRPr/>
+            </a:pPr>
+            <a:r>
+              <a:rPr lang="en-US" sz="1250" b="1" u="sng" spc="149">
+                <a:solidFill>
+                  <a:srgbClr val="734F96"/>
+                </a:solidFill>
+                <a:latin typeface="Cambria"/>
+                <a:ea typeface="Cambria"/>
+                <a:cs typeface="Cambria"/>
+              </a:rPr>
+              <a:t>CSC3107</a:t>
+            </a:r>
+            <a:endParaRPr sz="1250" b="1" u="sng" spc="149">
+              <a:solidFill>
+                <a:srgbClr val="734F96"/>
+              </a:solidFill>
+              <a:latin typeface="Cambria"/>
+              <a:ea typeface="Cambria"/>
+              <a:cs typeface="Cambria"/>
+            </a:endParaRPr>
+          </a:p>
+          <a:p>
+            <a:pPr marL="0" indent="0" algn="ctr">
+              <a:buNone/>
+              <a:defRPr/>
+            </a:pPr>
+            <a:r>
+              <a:rPr lang="en-US" sz="1250" b="1" u="sng" spc="149">
+                <a:solidFill>
+                  <a:srgbClr val="734F96"/>
+                </a:solidFill>
+                <a:latin typeface="Cambria"/>
+                <a:ea typeface="Cambria"/>
+                <a:cs typeface="Cambria"/>
+              </a:rPr>
+              <a:t>Team Lavender</a:t>
+            </a:r>
+            <a:endParaRPr sz="1250" u="sng">
+              <a:solidFill>
+                <a:srgbClr val="734F96"/>
+              </a:solidFill>
+            </a:endParaRPr>
           </a:p>
         </p:txBody>
       </p:sp>
